--- a/docs/latency/EO_IR_Panorama_Latency_Analysis.pptx
+++ b/docs/latency/EO_IR_Panorama_Latency_Analysis.pptx
@@ -138,7 +138,7 @@
               <c:strCache>
                 <c:ptCount val="1"/>
                 <c:pt idx="0">
-                  <c:v>Typical latency (ms)</c:v>
+                  <c:v>Typical latency (ms), measured</c:v>
                 </c:pt>
               </c:strCache>
             </c:strRef>
@@ -202,7 +202,7 @@
             <c:bubble3D val="0"/>
             <c:spPr>
               <a:solidFill>
-                <a:srgbClr val="1C7293"/>
+                <a:srgbClr val="5C9BB5"/>
               </a:solidFill>
               <a:effectLst/>
             </c:spPr>
@@ -213,7 +213,7 @@
             <c:bubble3D val="0"/>
             <c:spPr>
               <a:solidFill>
-                <a:srgbClr val="5C9BB5"/>
+                <a:srgbClr val="1C7293"/>
               </a:solidFill>
               <a:effectLst/>
             </c:spPr>
@@ -231,10 +231,10 @@
                     <c:v>IR single</c:v>
                   </c:pt>
                   <c:pt idx="2">
-                    <c:v>EO single</c:v>
+                    <c:v>EO panorama</c:v>
                   </c:pt>
                   <c:pt idx="3">
-                    <c:v>EO panorama</c:v>
+                    <c:v>EO single</c:v>
                   </c:pt>
                 </c:lvl>
               </c:multiLvlStrCache>
@@ -247,16 +247,16 @@
                 <c:formatCode>General</c:formatCode>
                 <c:ptCount val="4"/>
                 <c:pt idx="0">
-                  <c:v>69</c:v>
+                  <c:v>78</c:v>
                 </c:pt>
                 <c:pt idx="1">
-                  <c:v>100</c:v>
+                  <c:v>84</c:v>
                 </c:pt>
                 <c:pt idx="2">
-                  <c:v>100</c:v>
+                  <c:v>75</c:v>
                 </c:pt>
                 <c:pt idx="3">
-                  <c:v>117</c:v>
+                  <c:v>50</c:v>
                 </c:pt>
               </c:numCache>
             </c:numRef>
@@ -337,7 +337,7 @@
         <c:axId val="2094734552"/>
         <c:scaling>
           <c:orientation val="minMax"/>
-          <c:max val="140"/>
+          <c:max val="100"/>
         </c:scaling>
         <c:delete val="0"/>
         <c:axPos val="b"/>
@@ -2710,7 +2710,7 @@
                 <a:ea typeface="Calibri" pitchFamily="34" charset="-122"/>
                 <a:cs typeface="Calibri" pitchFamily="34" charset="-120"/>
               </a:rPr>
-              <a:t>Adopt direct ingress on the EO paths</a:t>
+              <a:t>Overlap rendering with ingest</a:t>
             </a:r>
             <a:endParaRPr lang="en-US" sz="1400" dirty="0"/>
           </a:p>
@@ -2749,7 +2749,7 @@
                 <a:ea typeface="Calibri" pitchFamily="34" charset="-122"/>
                 <a:cs typeface="Calibri" pitchFamily="34" charset="-120"/>
               </a:rPr>
-              <a:t>Overlap rendering onto arriving rows instead of storing whole frames first, exactly as the IR panorama already does.</a:t>
+              <a:t>Render onto arriving rows instead of storing whole frames first. The largest single term left in the panorama modes is the wait for a complete, matched set of frames.</a:t>
             </a:r>
             <a:endParaRPr lang="en-US" sz="1150" dirty="0"/>
           </a:p>
@@ -2945,7 +2945,7 @@
                 <a:ea typeface="Calibri" pitchFamily="34" charset="-122"/>
                 <a:cs typeface="Calibri" pitchFamily="34" charset="-120"/>
               </a:rPr>
-              <a:t>Fit the render inside one frame period</a:t>
+              <a:t>Publish the panorama modes every frame</a:t>
             </a:r>
             <a:endParaRPr lang="en-US" sz="1400" dirty="0"/>
           </a:p>
@@ -2984,7 +2984,7 @@
                 <a:ea typeface="Calibri" pitchFamily="34" charset="-122"/>
                 <a:cs typeface="Calibri" pitchFamily="34" charset="-120"/>
               </a:rPr>
-              <a:t>Restores a genuine 30 Hz refresh and removes the average 33 ms of extra staleness. The memory headroom for this has largely been recovered already.</a:t>
+              <a:t>The single-camera modes already achieve 30 new frames per second. Bringing the panorama modes to the same rate removes their extra 33 ms of staleness, and in EO panorama stops half the camera output being discarded.</a:t>
             </a:r>
             <a:endParaRPr lang="en-US" sz="1150" dirty="0"/>
           </a:p>
@@ -3669,7 +3669,7 @@
                 <a:ea typeface="Calibri" pitchFamily="34" charset="-122"/>
                 <a:cs typeface="Calibri" pitchFamily="34" charset="-120"/>
               </a:rPr>
-              <a:t>So the figures can be audited rather than taken on trust.</a:t>
+              <a:t>Revised 2026-08-19: the figures below replace an earlier derived set, which overstated the EO latencies by 30 to 50 ms.</a:t>
             </a:r>
             <a:endParaRPr lang="en-US" sz="1300" dirty="0"/>
           </a:p>
@@ -3684,6 +3684,182 @@
         <p:spPr>
           <a:xfrm>
             <a:off x="548640" y="1783080"/>
+            <a:ext cx="3547872" cy="2743200"/>
+          </a:xfrm>
+          <a:prstGeom prst="roundRect">
+            <a:avLst>
+              <a:gd name="adj" fmla="val 2000"/>
+            </a:avLst>
+          </a:prstGeom>
+          <a:solidFill>
+            <a:srgbClr val="FFFFFF"/>
+          </a:solidFill>
+          <a:ln w="19050">
+            <a:solidFill>
+              <a:srgbClr val="02A37A"/>
+            </a:solidFill>
+            <a:prstDash val="solid"/>
+          </a:ln>
+        </p:spPr>
+      </p:sp>
+      <p:sp>
+        <p:nvSpPr>
+          <p:cNvPr id="6" name="Shape 4"/>
+          <p:cNvSpPr/>
+          <p:nvPr/>
+        </p:nvSpPr>
+        <p:spPr>
+          <a:xfrm>
+            <a:off x="804672" y="2029968"/>
+            <a:ext cx="310896" cy="310896"/>
+          </a:xfrm>
+          <a:prstGeom prst="ellipse">
+            <a:avLst/>
+          </a:prstGeom>
+          <a:solidFill>
+            <a:srgbClr val="02A37A"/>
+          </a:solidFill>
+          <a:ln w="12700">
+            <a:solidFill>
+              <a:srgbClr val="02A37A"/>
+            </a:solidFill>
+            <a:prstDash val="solid"/>
+          </a:ln>
+        </p:spPr>
+      </p:sp>
+      <p:sp>
+        <p:nvSpPr>
+          <p:cNvPr id="7" name="Text 5"/>
+          <p:cNvSpPr/>
+          <p:nvPr/>
+        </p:nvSpPr>
+        <p:spPr>
+          <a:xfrm>
+            <a:off x="1225296" y="2011680"/>
+            <a:ext cx="2743200" cy="347472"/>
+          </a:xfrm>
+          <a:prstGeom prst="rect">
+            <a:avLst/>
+          </a:prstGeom>
+          <a:noFill/>
+          <a:ln/>
+        </p:spPr>
+        <p:txBody>
+          <a:bodyPr wrap="square" lIns="0" tIns="0" rIns="0" bIns="0" rtlCol="0" anchor="ctr"/>
+          <a:lstStyle/>
+          <a:p>
+            <a:pPr indent="0" marL="0">
+              <a:buNone/>
+            </a:pPr>
+            <a:r>
+              <a:rPr lang="en-US" sz="1350" b="1" dirty="0">
+                <a:solidFill>
+                  <a:srgbClr val="0E1C36"/>
+                </a:solidFill>
+                <a:latin typeface="Calibri" pitchFamily="34" charset="0"/>
+                <a:ea typeface="Calibri" pitchFamily="34" charset="-122"/>
+                <a:cs typeface="Calibri" pitchFamily="34" charset="-120"/>
+              </a:rPr>
+              <a:t>Measured on hardware</a:t>
+            </a:r>
+            <a:endParaRPr lang="en-US" sz="1350" dirty="0"/>
+          </a:p>
+        </p:txBody>
+      </p:sp>
+      <p:sp>
+        <p:nvSpPr>
+          <p:cNvPr id="8" name="Text 6"/>
+          <p:cNvSpPr/>
+          <p:nvPr/>
+        </p:nvSpPr>
+        <p:spPr>
+          <a:xfrm>
+            <a:off x="822960" y="2514600"/>
+            <a:ext cx="3017520" cy="1920240"/>
+          </a:xfrm>
+          <a:prstGeom prst="rect">
+            <a:avLst/>
+          </a:prstGeom>
+          <a:noFill/>
+          <a:ln/>
+        </p:spPr>
+        <p:txBody>
+          <a:bodyPr wrap="square" lIns="0" tIns="0" rIns="0" bIns="0" rtlCol="0" anchor="t"/>
+          <a:lstStyle/>
+          <a:p>
+            <a:pPr marL="342900" indent="-342900">
+              <a:spcAft>
+                <a:spcPts val="800"/>
+              </a:spcAft>
+              <a:buSzPct val="100000"/>
+              <a:buChar char="•"/>
+            </a:pPr>
+            <a:r>
+              <a:rPr lang="en-US" sz="1100" dirty="0">
+                <a:solidFill>
+                  <a:srgbClr val="27374F"/>
+                </a:solidFill>
+                <a:latin typeface="Calibri" pitchFamily="34" charset="0"/>
+                <a:ea typeface="Calibri" pitchFamily="34" charset="-122"/>
+                <a:cs typeface="Calibri" pitchFamily="34" charset="-120"/>
+              </a:rPr>
+              <a:t>Frame rates and latency from a timing block in the FPGA, since a debug capture window is 8.8 us and cannot see a 33 ms interval</a:t>
+            </a:r>
+            <a:endParaRPr lang="en-US" sz="1100" dirty="0"/>
+          </a:p>
+          <a:p>
+            <a:pPr marL="342900" indent="-342900">
+              <a:spcAft>
+                <a:spcPts val="800"/>
+              </a:spcAft>
+              <a:buSzPct val="100000"/>
+              <a:buChar char="•"/>
+            </a:pPr>
+            <a:r>
+              <a:rPr lang="en-US" sz="1100" dirty="0">
+                <a:solidFill>
+                  <a:srgbClr val="27374F"/>
+                </a:solidFill>
+                <a:latin typeface="Calibri" pitchFamily="34" charset="0"/>
+                <a:ea typeface="Calibri" pitchFamily="34" charset="-122"/>
+                <a:cs typeface="Calibri" pitchFamily="34" charset="-120"/>
+              </a:rPr>
+              <a:t>That block is itself calibrated against known intervals before being trusted</a:t>
+            </a:r>
+            <a:endParaRPr lang="en-US" sz="1100" dirty="0"/>
+          </a:p>
+          <a:p>
+            <a:pPr marL="342900" indent="-342900">
+              <a:spcAft>
+                <a:spcPts val="800"/>
+              </a:spcAft>
+              <a:buSzPct val="100000"/>
+              <a:buChar char="•"/>
+            </a:pPr>
+            <a:r>
+              <a:rPr lang="en-US" sz="1100" dirty="0">
+                <a:solidFill>
+                  <a:srgbClr val="27374F"/>
+                </a:solidFill>
+                <a:latin typeface="Calibri" pitchFamily="34" charset="0"/>
+                <a:ea typeface="Calibri" pitchFamily="34" charset="-122"/>
+                <a:cs typeface="Calibri" pitchFamily="34" charset="-120"/>
+              </a:rPr>
+              <a:t>Publication rates counted over a full minute, not inferred from one interval</a:t>
+            </a:r>
+            <a:endParaRPr lang="en-US" sz="1100" dirty="0"/>
+          </a:p>
+        </p:txBody>
+      </p:sp>
+      <p:sp>
+        <p:nvSpPr>
+          <p:cNvPr id="9" name="Shape 7"/>
+          <p:cNvSpPr/>
+          <p:nvPr/>
+        </p:nvSpPr>
+        <p:spPr>
+          <a:xfrm>
+            <a:off x="4325112" y="1783080"/>
             <a:ext cx="3547872" cy="2743200"/>
           </a:xfrm>
           <a:prstGeom prst="roundRect">
@@ -3704,13 +3880,13 @@
       </p:sp>
       <p:sp>
         <p:nvSpPr>
-          <p:cNvPr id="6" name="Shape 4"/>
-          <p:cNvSpPr/>
-          <p:nvPr/>
-        </p:nvSpPr>
-        <p:spPr>
-          <a:xfrm>
-            <a:off x="804672" y="2029968"/>
+          <p:cNvPr id="10" name="Shape 8"/>
+          <p:cNvSpPr/>
+          <p:nvPr/>
+        </p:nvSpPr>
+        <p:spPr>
+          <a:xfrm>
+            <a:off x="4581144" y="2029968"/>
             <a:ext cx="310896" cy="310896"/>
           </a:xfrm>
           <a:prstGeom prst="ellipse">
@@ -3729,13 +3905,13 @@
       </p:sp>
       <p:sp>
         <p:nvSpPr>
-          <p:cNvPr id="7" name="Text 5"/>
-          <p:cNvSpPr/>
-          <p:nvPr/>
-        </p:nvSpPr>
-        <p:spPr>
-          <a:xfrm>
-            <a:off x="1225296" y="2011680"/>
+          <p:cNvPr id="11" name="Text 9"/>
+          <p:cNvSpPr/>
+          <p:nvPr/>
+        </p:nvSpPr>
+        <p:spPr>
+          <a:xfrm>
+            <a:off x="5001768" y="2011680"/>
             <a:ext cx="2743200" cy="347472"/>
           </a:xfrm>
           <a:prstGeom prst="rect">
@@ -3768,13 +3944,13 @@
       </p:sp>
       <p:sp>
         <p:nvSpPr>
-          <p:cNvPr id="8" name="Text 6"/>
-          <p:cNvSpPr/>
-          <p:nvPr/>
-        </p:nvSpPr>
-        <p:spPr>
-          <a:xfrm>
-            <a:off x="822960" y="2514600"/>
+          <p:cNvPr id="12" name="Text 10"/>
+          <p:cNvSpPr/>
+          <p:nvPr/>
+        </p:nvSpPr>
+        <p:spPr>
+          <a:xfrm>
+            <a:off x="4599432" y="2514600"/>
             <a:ext cx="3017520" cy="1920240"/>
           </a:xfrm>
           <a:prstGeom prst="rect">
@@ -3845,204 +4021,7 @@
                 <a:ea typeface="Calibri" pitchFamily="34" charset="-122"/>
                 <a:cs typeface="Calibri" pitchFamily="34" charset="-120"/>
               </a:rPr>
-              <a:t>35 source rows before the IR panorama can emit its first output row</a:t>
-            </a:r>
-            <a:endParaRPr lang="en-US" sz="1100" dirty="0"/>
-          </a:p>
-          <a:p>
-            <a:pPr marL="342900" indent="-342900">
-              <a:spcAft>
-                <a:spcPts val="800"/>
-              </a:spcAft>
-              <a:buSzPct val="100000"/>
-              <a:buChar char="•"/>
-            </a:pPr>
-            <a:r>
-              <a:rPr lang="en-US" sz="1100" dirty="0">
-                <a:solidFill>
-                  <a:srgbClr val="27374F"/>
-                </a:solidFill>
-                <a:latin typeface="Calibri" pitchFamily="34" charset="0"/>
-                <a:ea typeface="Calibri" pitchFamily="34" charset="-122"/>
-                <a:cs typeface="Calibri" pitchFamily="34" charset="-120"/>
-              </a:rPr>
               <a:t>Read directly from the design and its generated geometry tables</a:t>
-            </a:r>
-            <a:endParaRPr lang="en-US" sz="1100" dirty="0"/>
-          </a:p>
-        </p:txBody>
-      </p:sp>
-      <p:sp>
-        <p:nvSpPr>
-          <p:cNvPr id="9" name="Shape 7"/>
-          <p:cNvSpPr/>
-          <p:nvPr/>
-        </p:nvSpPr>
-        <p:spPr>
-          <a:xfrm>
-            <a:off x="4325112" y="1783080"/>
-            <a:ext cx="3547872" cy="2743200"/>
-          </a:xfrm>
-          <a:prstGeom prst="roundRect">
-            <a:avLst>
-              <a:gd name="adj" fmla="val 2000"/>
-            </a:avLst>
-          </a:prstGeom>
-          <a:solidFill>
-            <a:srgbClr val="FFFFFF"/>
-          </a:solidFill>
-          <a:ln w="19050">
-            <a:solidFill>
-              <a:srgbClr val="02A37A"/>
-            </a:solidFill>
-            <a:prstDash val="solid"/>
-          </a:ln>
-        </p:spPr>
-      </p:sp>
-      <p:sp>
-        <p:nvSpPr>
-          <p:cNvPr id="10" name="Shape 8"/>
-          <p:cNvSpPr/>
-          <p:nvPr/>
-        </p:nvSpPr>
-        <p:spPr>
-          <a:xfrm>
-            <a:off x="4581144" y="2029968"/>
-            <a:ext cx="310896" cy="310896"/>
-          </a:xfrm>
-          <a:prstGeom prst="ellipse">
-            <a:avLst/>
-          </a:prstGeom>
-          <a:solidFill>
-            <a:srgbClr val="02A37A"/>
-          </a:solidFill>
-          <a:ln w="12700">
-            <a:solidFill>
-              <a:srgbClr val="02A37A"/>
-            </a:solidFill>
-            <a:prstDash val="solid"/>
-          </a:ln>
-        </p:spPr>
-      </p:sp>
-      <p:sp>
-        <p:nvSpPr>
-          <p:cNvPr id="11" name="Text 9"/>
-          <p:cNvSpPr/>
-          <p:nvPr/>
-        </p:nvSpPr>
-        <p:spPr>
-          <a:xfrm>
-            <a:off x="5001768" y="2011680"/>
-            <a:ext cx="2743200" cy="347472"/>
-          </a:xfrm>
-          <a:prstGeom prst="rect">
-            <a:avLst/>
-          </a:prstGeom>
-          <a:noFill/>
-          <a:ln/>
-        </p:spPr>
-        <p:txBody>
-          <a:bodyPr wrap="square" lIns="0" tIns="0" rIns="0" bIns="0" rtlCol="0" anchor="ctr"/>
-          <a:lstStyle/>
-          <a:p>
-            <a:pPr indent="0" marL="0">
-              <a:buNone/>
-            </a:pPr>
-            <a:r>
-              <a:rPr lang="en-US" sz="1350" b="1" dirty="0">
-                <a:solidFill>
-                  <a:srgbClr val="0E1C36"/>
-                </a:solidFill>
-                <a:latin typeface="Calibri" pitchFamily="34" charset="0"/>
-                <a:ea typeface="Calibri" pitchFamily="34" charset="-122"/>
-                <a:cs typeface="Calibri" pitchFamily="34" charset="-120"/>
-              </a:rPr>
-              <a:t>Measured on hardware</a:t>
-            </a:r>
-            <a:endParaRPr lang="en-US" sz="1350" dirty="0"/>
-          </a:p>
-        </p:txBody>
-      </p:sp>
-      <p:sp>
-        <p:nvSpPr>
-          <p:cNvPr id="12" name="Text 10"/>
-          <p:cNvSpPr/>
-          <p:nvPr/>
-        </p:nvSpPr>
-        <p:spPr>
-          <a:xfrm>
-            <a:off x="4599432" y="2514600"/>
-            <a:ext cx="3017520" cy="1920240"/>
-          </a:xfrm>
-          <a:prstGeom prst="rect">
-            <a:avLst/>
-          </a:prstGeom>
-          <a:noFill/>
-          <a:ln/>
-        </p:spPr>
-        <p:txBody>
-          <a:bodyPr wrap="square" lIns="0" tIns="0" rIns="0" bIns="0" rtlCol="0" anchor="t"/>
-          <a:lstStyle/>
-          <a:p>
-            <a:pPr marL="342900" indent="-342900">
-              <a:spcAft>
-                <a:spcPts val="800"/>
-              </a:spcAft>
-              <a:buSzPct val="100000"/>
-              <a:buChar char="•"/>
-            </a:pPr>
-            <a:r>
-              <a:rPr lang="en-US" sz="1100" dirty="0">
-                <a:solidFill>
-                  <a:srgbClr val="27374F"/>
-                </a:solidFill>
-                <a:latin typeface="Calibri" pitchFamily="34" charset="0"/>
-                <a:ea typeface="Calibri" pitchFamily="34" charset="-122"/>
-                <a:cs typeface="Calibri" pitchFamily="34" charset="-120"/>
-              </a:rPr>
-              <a:t>Output refresh 15.1 Hz on the EO paths, from four independent captures</a:t>
-            </a:r>
-            <a:endParaRPr lang="en-US" sz="1100" dirty="0"/>
-          </a:p>
-          <a:p>
-            <a:pPr marL="342900" indent="-342900">
-              <a:spcAft>
-                <a:spcPts val="800"/>
-              </a:spcAft>
-              <a:buSzPct val="100000"/>
-              <a:buChar char="•"/>
-            </a:pPr>
-            <a:r>
-              <a:rPr lang="en-US" sz="1100" dirty="0">
-                <a:solidFill>
-                  <a:srgbClr val="27374F"/>
-                </a:solidFill>
-                <a:latin typeface="Calibri" pitchFamily="34" charset="0"/>
-                <a:ea typeface="Calibri" pitchFamily="34" charset="-122"/>
-                <a:cs typeface="Calibri" pitchFamily="34" charset="-120"/>
-              </a:rPr>
-              <a:t>IR genlock skew under 274 ns across six cameras</a:t>
-            </a:r>
-            <a:endParaRPr lang="en-US" sz="1100" dirty="0"/>
-          </a:p>
-          <a:p>
-            <a:pPr marL="342900" indent="-342900">
-              <a:spcAft>
-                <a:spcPts val="800"/>
-              </a:spcAft>
-              <a:buSzPct val="100000"/>
-              <a:buChar char="•"/>
-            </a:pPr>
-            <a:r>
-              <a:rPr lang="en-US" sz="1100" dirty="0">
-                <a:solidFill>
-                  <a:srgbClr val="27374F"/>
-                </a:solidFill>
-                <a:latin typeface="Calibri" pitchFamily="34" charset="0"/>
-                <a:ea typeface="Calibri" pitchFamily="34" charset="-122"/>
-                <a:cs typeface="Calibri" pitchFamily="34" charset="-120"/>
-              </a:rPr>
-              <a:t>Memory write throughput before and after the August fix</a:t>
             </a:r>
             <a:endParaRPr lang="en-US" sz="1100" dirty="0"/>
           </a:p>
@@ -4197,7 +4176,7 @@
                 <a:ea typeface="Calibri" pitchFamily="34" charset="-122"/>
                 <a:cs typeface="Calibri" pitchFamily="34" charset="-120"/>
               </a:rPr>
-              <a:t>Commit and scan-out quoted at their average; both range 0 to one frame</a:t>
+              <a:t>A row's age when its frame completes, and its scan position, are quoted at their average; each ranges 0 to one frame</a:t>
             </a:r>
             <a:endParaRPr lang="en-US" sz="1100" dirty="0"/>
           </a:p>
@@ -4218,7 +4197,7 @@
                 <a:ea typeface="Calibri" pitchFamily="34" charset="-122"/>
                 <a:cs typeface="Calibri" pitchFamily="34" charset="-120"/>
               </a:rPr>
-              <a:t>Render occupancy taken as one frame period, consistent with the measured refresh</a:t>
+              <a:t>EO panorama is a lower bound: the matched set displayed can be older than the frame timed from</a:t>
             </a:r>
             <a:endParaRPr lang="en-US" sz="1100" dirty="0"/>
           </a:p>
@@ -4257,7 +4236,7 @@
                 <a:ea typeface="Calibri" pitchFamily="34" charset="-122"/>
                 <a:cs typeface="Calibri" pitchFamily="34" charset="-120"/>
               </a:rPr>
-              <a:t>Latency was derived from the pipeline structure and validated against the measured refresh rate; it was not measured end to end with an external timing reference.</a:t>
+              <a:t>The middle term of every figure is measured inside the FPGA. An end-to-end sensor-to-display number would additionally need an external optical reference, which has not been run.</a:t>
             </a:r>
             <a:endParaRPr lang="en-US" sz="1150" dirty="0"/>
           </a:p>
@@ -7865,7 +7844,7 @@
                 <a:ea typeface="Calibri" pitchFamily="34" charset="-122"/>
                 <a:cs typeface="Calibri" pitchFamily="34" charset="-120"/>
               </a:rPr>
-              <a:t>33.3 ms</a:t>
+              <a:t>10.1 ms measured</a:t>
             </a:r>
             <a:endParaRPr lang="en-US" sz="1200" dirty="0"/>
           </a:p>
@@ -8385,7 +8364,7 @@
         <p:spPr>
           <a:xfrm>
             <a:off x="548640" y="4114800"/>
-            <a:ext cx="1725473" cy="365760"/>
+            <a:ext cx="1081659" cy="365760"/>
           </a:xfrm>
           <a:prstGeom prst="rect">
             <a:avLst/>
@@ -8410,7 +8389,7 @@
         <p:spPr>
           <a:xfrm>
             <a:off x="548640" y="4114800"/>
-            <a:ext cx="1725473" cy="365760"/>
+            <a:ext cx="1081659" cy="365760"/>
           </a:xfrm>
           <a:prstGeom prst="rect">
             <a:avLst/>
@@ -8434,7 +8413,7 @@
                 <a:ea typeface="Calibri" pitchFamily="34" charset="-122"/>
                 <a:cs typeface="Calibri" pitchFamily="34" charset="-120"/>
               </a:rPr>
-              <a:t>Ingest 33.3</a:t>
+              <a:t>Row age 16.7</a:t>
             </a:r>
             <a:endParaRPr lang="en-US" sz="950" dirty="0"/>
           </a:p>
@@ -8448,8 +8427,8 @@
         </p:nvSpPr>
         <p:spPr>
           <a:xfrm>
-            <a:off x="2274113" y="4114800"/>
-            <a:ext cx="1725473" cy="365760"/>
+            <a:off x="1630299" y="4114800"/>
+            <a:ext cx="1062228" cy="365760"/>
           </a:xfrm>
           <a:prstGeom prst="rect">
             <a:avLst/>
@@ -8473,8 +8452,8 @@
         </p:nvSpPr>
         <p:spPr>
           <a:xfrm>
-            <a:off x="2274113" y="4114800"/>
-            <a:ext cx="1725473" cy="365760"/>
+            <a:off x="1630299" y="4114800"/>
+            <a:ext cx="1062228" cy="365760"/>
           </a:xfrm>
           <a:prstGeom prst="rect">
             <a:avLst/>
@@ -8498,7 +8477,7 @@
                 <a:ea typeface="Calibri" pitchFamily="34" charset="-122"/>
                 <a:cs typeface="Calibri" pitchFamily="34" charset="-120"/>
               </a:rPr>
-              <a:t>Render 33.3</a:t>
+              <a:t>16.4 measured</a:t>
             </a:r>
             <a:endParaRPr lang="en-US" sz="950" dirty="0"/>
           </a:p>
@@ -8512,72 +8491,8 @@
         </p:nvSpPr>
         <p:spPr>
           <a:xfrm>
-            <a:off x="3999586" y="4114800"/>
-            <a:ext cx="865327" cy="365760"/>
-          </a:xfrm>
-          <a:prstGeom prst="rect">
-            <a:avLst/>
-          </a:prstGeom>
-          <a:solidFill>
-            <a:srgbClr val="02A37A"/>
-          </a:solidFill>
-          <a:ln w="12700">
-            <a:solidFill>
-              <a:srgbClr val="FFFFFF"/>
-            </a:solidFill>
-            <a:prstDash val="solid"/>
-          </a:ln>
-        </p:spPr>
-      </p:sp>
-      <p:sp>
-        <p:nvSpPr>
-          <p:cNvPr id="45" name="Text 43"/>
-          <p:cNvSpPr/>
-          <p:nvPr/>
-        </p:nvSpPr>
-        <p:spPr>
-          <a:xfrm>
-            <a:off x="3999586" y="4114800"/>
-            <a:ext cx="865327" cy="365760"/>
-          </a:xfrm>
-          <a:prstGeom prst="rect">
-            <a:avLst/>
-          </a:prstGeom>
-          <a:noFill/>
-          <a:ln/>
-        </p:spPr>
-        <p:txBody>
-          <a:bodyPr wrap="square" lIns="0" tIns="0" rIns="0" bIns="0" rtlCol="0" anchor="ctr"/>
-          <a:lstStyle/>
-          <a:p>
-            <a:pPr algn="ctr" indent="0" marL="0">
-              <a:buNone/>
-            </a:pPr>
-            <a:r>
-              <a:rPr lang="en-US" sz="950" b="1" dirty="0">
-                <a:solidFill>
-                  <a:srgbClr val="FFFFFF"/>
-                </a:solidFill>
-                <a:latin typeface="Calibri" pitchFamily="34" charset="0"/>
-                <a:ea typeface="Calibri" pitchFamily="34" charset="-122"/>
-                <a:cs typeface="Calibri" pitchFamily="34" charset="-120"/>
-              </a:rPr>
-              <a:t>Commit</a:t>
-            </a:r>
-            <a:endParaRPr lang="en-US" sz="950" dirty="0"/>
-          </a:p>
-        </p:txBody>
-      </p:sp>
-      <p:sp>
-        <p:nvSpPr>
-          <p:cNvPr id="46" name="Shape 44"/>
-          <p:cNvSpPr/>
-          <p:nvPr/>
-        </p:nvSpPr>
-        <p:spPr>
-          <a:xfrm>
-            <a:off x="4864913" y="4114800"/>
-            <a:ext cx="865327" cy="365760"/>
+            <a:off x="2692527" y="4114800"/>
+            <a:ext cx="1081659" cy="365760"/>
           </a:xfrm>
           <a:prstGeom prst="rect">
             <a:avLst/>
@@ -8595,14 +8510,14 @@
       </p:sp>
       <p:sp>
         <p:nvSpPr>
-          <p:cNvPr id="47" name="Text 45"/>
-          <p:cNvSpPr/>
-          <p:nvPr/>
-        </p:nvSpPr>
-        <p:spPr>
-          <a:xfrm>
-            <a:off x="4864913" y="4114800"/>
-            <a:ext cx="865327" cy="365760"/>
+          <p:cNvPr id="45" name="Text 43"/>
+          <p:cNvSpPr/>
+          <p:nvPr/>
+        </p:nvSpPr>
+        <p:spPr>
+          <a:xfrm>
+            <a:off x="2692527" y="4114800"/>
+            <a:ext cx="1081659" cy="365760"/>
           </a:xfrm>
           <a:prstGeom prst="rect">
             <a:avLst/>
@@ -8626,7 +8541,7 @@
                 <a:ea typeface="Calibri" pitchFamily="34" charset="-122"/>
                 <a:cs typeface="Calibri" pitchFamily="34" charset="-120"/>
               </a:rPr>
-              <a:t>Scan</a:t>
+              <a:t>Scan 16.7</a:t>
             </a:r>
             <a:endParaRPr lang="en-US" sz="950" dirty="0"/>
           </a:p>
@@ -8634,7 +8549,7 @@
       </p:sp>
       <p:sp>
         <p:nvSpPr>
-          <p:cNvPr id="48" name="Text 46"/>
+          <p:cNvPr id="46" name="Text 44"/>
           <p:cNvSpPr/>
           <p:nvPr/>
         </p:nvSpPr>
@@ -8665,7 +8580,7 @@
                 <a:ea typeface="Calibri" pitchFamily="34" charset="-122"/>
                 <a:cs typeface="Calibri" pitchFamily="34" charset="-120"/>
               </a:rPr>
-              <a:t>Bars are proportional. Commit and scan shown at their average of 16.7 ms each.</a:t>
+              <a:t>Measured centre segment. Row age and scan position each range 0 to 33.3 ms; shown at their average.</a:t>
             </a:r>
             <a:endParaRPr lang="en-US" sz="1000" dirty="0"/>
           </a:p>
@@ -8673,7 +8588,7 @@
       </p:sp>
       <p:sp>
         <p:nvSpPr>
-          <p:cNvPr id="49" name="Shape 47"/>
+          <p:cNvPr id="47" name="Shape 45"/>
           <p:cNvSpPr/>
           <p:nvPr/>
         </p:nvSpPr>
@@ -8700,7 +8615,7 @@
       </p:sp>
       <p:sp>
         <p:nvSpPr>
-          <p:cNvPr id="50" name="Text 48"/>
+          <p:cNvPr id="48" name="Text 46"/>
           <p:cNvSpPr/>
           <p:nvPr/>
         </p:nvSpPr>
@@ -8731,7 +8646,7 @@
                 <a:ea typeface="Cambria" pitchFamily="34" charset="-122"/>
                 <a:cs typeface="Cambria" pitchFamily="34" charset="-120"/>
               </a:rPr>
-              <a:t>67 ms</a:t>
+              <a:t>16 ms</a:t>
             </a:r>
             <a:endParaRPr lang="en-US" sz="2500" dirty="0"/>
           </a:p>
@@ -8739,7 +8654,7 @@
       </p:sp>
       <p:sp>
         <p:nvSpPr>
-          <p:cNvPr id="51" name="Text 49"/>
+          <p:cNvPr id="49" name="Text 47"/>
           <p:cNvSpPr/>
           <p:nvPr/>
         </p:nvSpPr>
@@ -8778,7 +8693,7 @@
       </p:sp>
       <p:sp>
         <p:nvSpPr>
-          <p:cNvPr id="52" name="Shape 50"/>
+          <p:cNvPr id="50" name="Shape 48"/>
           <p:cNvSpPr/>
           <p:nvPr/>
         </p:nvSpPr>
@@ -8805,7 +8720,7 @@
       </p:sp>
       <p:sp>
         <p:nvSpPr>
-          <p:cNvPr id="53" name="Text 51"/>
+          <p:cNvPr id="51" name="Text 49"/>
           <p:cNvSpPr/>
           <p:nvPr/>
         </p:nvSpPr>
@@ -8836,7 +8751,7 @@
                 <a:ea typeface="Cambria" pitchFamily="34" charset="-122"/>
                 <a:cs typeface="Cambria" pitchFamily="34" charset="-120"/>
               </a:rPr>
-              <a:t>133 ms</a:t>
+              <a:t>83 ms</a:t>
             </a:r>
             <a:endParaRPr lang="en-US" sz="2500" dirty="0"/>
           </a:p>
@@ -8844,7 +8759,7 @@
       </p:sp>
       <p:sp>
         <p:nvSpPr>
-          <p:cNvPr id="54" name="Text 52"/>
+          <p:cNvPr id="52" name="Text 50"/>
           <p:cNvSpPr/>
           <p:nvPr/>
         </p:nvSpPr>
@@ -8883,7 +8798,7 @@
       </p:sp>
       <p:sp>
         <p:nvSpPr>
-          <p:cNvPr id="55" name="Shape 53"/>
+          <p:cNvPr id="53" name="Shape 51"/>
           <p:cNvSpPr/>
           <p:nvPr/>
         </p:nvSpPr>
@@ -8910,7 +8825,7 @@
       </p:sp>
       <p:sp>
         <p:nvSpPr>
-          <p:cNvPr id="56" name="Text 54"/>
+          <p:cNvPr id="54" name="Text 52"/>
           <p:cNvSpPr/>
           <p:nvPr/>
         </p:nvSpPr>
@@ -8941,7 +8856,7 @@
                 <a:ea typeface="Cambria" pitchFamily="34" charset="-122"/>
                 <a:cs typeface="Cambria" pitchFamily="34" charset="-120"/>
               </a:rPr>
-              <a:t>100 ms  </a:t>
+              <a:t>50 ms  </a:t>
             </a:r>
             <a:pPr algn="ctr" indent="0" marL="0">
               <a:buNone/>
@@ -8963,7 +8878,7 @@
       </p:sp>
       <p:sp>
         <p:nvSpPr>
-          <p:cNvPr id="57" name="Shape 55"/>
+          <p:cNvPr id="55" name="Shape 53"/>
           <p:cNvSpPr/>
           <p:nvPr/>
         </p:nvSpPr>
@@ -8978,11 +8893,11 @@
             </a:avLst>
           </a:prstGeom>
           <a:solidFill>
-            <a:srgbClr val="F2F5FA"/>
+            <a:srgbClr val="DAF2EB"/>
           </a:solidFill>
           <a:ln w="12700">
             <a:solidFill>
-              <a:srgbClr val="D3DCEA"/>
+              <a:srgbClr val="02A37A"/>
             </a:solidFill>
             <a:prstDash val="solid"/>
           </a:ln>
@@ -8990,7 +8905,7 @@
       </p:sp>
       <p:sp>
         <p:nvSpPr>
-          <p:cNvPr id="58" name="Text 56"/>
+          <p:cNvPr id="56" name="Text 54"/>
           <p:cNvSpPr/>
           <p:nvPr/>
         </p:nvSpPr>
@@ -9021,7 +8936,7 @@
                 <a:ea typeface="Calibri" pitchFamily="34" charset="-122"/>
                 <a:cs typeface="Calibri" pitchFamily="34" charset="-120"/>
               </a:rPr>
-              <a:t>What sets it:  </a:t>
+              <a:t>Measured, not derived:  </a:t>
             </a:r>
             <a:pPr indent="0" marL="0">
               <a:buNone/>
@@ -9035,7 +8950,7 @@
                 <a:ea typeface="Calibri" pitchFamily="34" charset="-122"/>
                 <a:cs typeface="Calibri" pitchFamily="34" charset="-120"/>
               </a:rPr>
-              <a:t>the store-and-forward round trip. The frame is fully written before any of it is read back, so ingest and render cannot overlap.</a:t>
+              <a:t>16.4 ms from the frame becoming available to the output being published, and 29.75 new frames per second - full rate. The render is far quicker than the derived analysis assumed.</a:t>
             </a:r>
             <a:endParaRPr lang="en-US" sz="1200" dirty="0"/>
           </a:p>
@@ -9858,7 +9773,7 @@
                 <a:ea typeface="Calibri" pitchFamily="34" charset="-122"/>
                 <a:cs typeface="Calibri" pitchFamily="34" charset="-120"/>
               </a:rPr>
-              <a:t>33.3 ms</a:t>
+              <a:t>38.2 ms measured</a:t>
             </a:r>
             <a:endParaRPr lang="en-US" sz="1200" dirty="0"/>
           </a:p>
@@ -10378,7 +10293,7 @@
         <p:spPr>
           <a:xfrm>
             <a:off x="548640" y="4114800"/>
-            <a:ext cx="1725473" cy="365760"/>
+            <a:ext cx="1081659" cy="365760"/>
           </a:xfrm>
           <a:prstGeom prst="rect">
             <a:avLst/>
@@ -10403,7 +10318,7 @@
         <p:spPr>
           <a:xfrm>
             <a:off x="548640" y="4114800"/>
-            <a:ext cx="1725473" cy="365760"/>
+            <a:ext cx="1081659" cy="365760"/>
           </a:xfrm>
           <a:prstGeom prst="rect">
             <a:avLst/>
@@ -10427,7 +10342,7 @@
                 <a:ea typeface="Calibri" pitchFamily="34" charset="-122"/>
                 <a:cs typeface="Calibri" pitchFamily="34" charset="-120"/>
               </a:rPr>
-              <a:t>Ingest 33.3</a:t>
+              <a:t>Row age 16.7</a:t>
             </a:r>
             <a:endParaRPr lang="en-US" sz="950" dirty="0"/>
           </a:p>
@@ -10441,72 +10356,8 @@
         </p:nvSpPr>
         <p:spPr>
           <a:xfrm>
-            <a:off x="2274113" y="4114800"/>
-            <a:ext cx="865327" cy="365760"/>
-          </a:xfrm>
-          <a:prstGeom prst="rect">
-            <a:avLst/>
-          </a:prstGeom>
-          <a:solidFill>
-            <a:srgbClr val="5C9BB5"/>
-          </a:solidFill>
-          <a:ln w="12700">
-            <a:solidFill>
-              <a:srgbClr val="FFFFFF"/>
-            </a:solidFill>
-            <a:prstDash val="solid"/>
-          </a:ln>
-        </p:spPr>
-      </p:sp>
-      <p:sp>
-        <p:nvSpPr>
-          <p:cNvPr id="43" name="Text 41"/>
-          <p:cNvSpPr/>
-          <p:nvPr/>
-        </p:nvSpPr>
-        <p:spPr>
-          <a:xfrm>
-            <a:off x="2274113" y="4114800"/>
-            <a:ext cx="865327" cy="365760"/>
-          </a:xfrm>
-          <a:prstGeom prst="rect">
-            <a:avLst/>
-          </a:prstGeom>
-          <a:noFill/>
-          <a:ln/>
-        </p:spPr>
-        <p:txBody>
-          <a:bodyPr wrap="square" lIns="0" tIns="0" rIns="0" bIns="0" rtlCol="0" anchor="ctr"/>
-          <a:lstStyle/>
-          <a:p>
-            <a:pPr algn="ctr" indent="0" marL="0">
-              <a:buNone/>
-            </a:pPr>
-            <a:r>
-              <a:rPr lang="en-US" sz="950" b="1" dirty="0">
-                <a:solidFill>
-                  <a:srgbClr val="FFFFFF"/>
-                </a:solidFill>
-                <a:latin typeface="Calibri" pitchFamily="34" charset="0"/>
-                <a:ea typeface="Calibri" pitchFamily="34" charset="-122"/>
-                <a:cs typeface="Calibri" pitchFamily="34" charset="-120"/>
-              </a:rPr>
-              <a:t>Align 16.7</a:t>
-            </a:r>
-            <a:endParaRPr lang="en-US" sz="950" dirty="0"/>
-          </a:p>
-        </p:txBody>
-      </p:sp>
-      <p:sp>
-        <p:nvSpPr>
-          <p:cNvPr id="44" name="Shape 42"/>
-          <p:cNvSpPr/>
-          <p:nvPr/>
-        </p:nvSpPr>
-        <p:spPr>
-          <a:xfrm>
-            <a:off x="3139440" y="4114800"/>
-            <a:ext cx="1725473" cy="365760"/>
+            <a:off x="1630299" y="4114800"/>
+            <a:ext cx="2662047" cy="365760"/>
           </a:xfrm>
           <a:prstGeom prst="rect">
             <a:avLst/>
@@ -10524,14 +10375,14 @@
       </p:sp>
       <p:sp>
         <p:nvSpPr>
-          <p:cNvPr id="45" name="Text 43"/>
-          <p:cNvSpPr/>
-          <p:nvPr/>
-        </p:nvSpPr>
-        <p:spPr>
-          <a:xfrm>
-            <a:off x="3139440" y="4114800"/>
-            <a:ext cx="1725473" cy="365760"/>
+          <p:cNvPr id="43" name="Text 41"/>
+          <p:cNvSpPr/>
+          <p:nvPr/>
+        </p:nvSpPr>
+        <p:spPr>
+          <a:xfrm>
+            <a:off x="1630299" y="4114800"/>
+            <a:ext cx="2662047" cy="365760"/>
           </a:xfrm>
           <a:prstGeom prst="rect">
             <a:avLst/>
@@ -10555,7 +10406,7 @@
                 <a:ea typeface="Calibri" pitchFamily="34" charset="-122"/>
                 <a:cs typeface="Calibri" pitchFamily="34" charset="-120"/>
               </a:rPr>
-              <a:t>Render 33.3</a:t>
+              <a:t>41.1 measured  (align + render + publish)</a:t>
             </a:r>
             <a:endParaRPr lang="en-US" sz="950" dirty="0"/>
           </a:p>
@@ -10563,78 +10414,14 @@
       </p:sp>
       <p:sp>
         <p:nvSpPr>
-          <p:cNvPr id="46" name="Shape 44"/>
-          <p:cNvSpPr/>
-          <p:nvPr/>
-        </p:nvSpPr>
-        <p:spPr>
-          <a:xfrm>
-            <a:off x="4864913" y="4114800"/>
-            <a:ext cx="865327" cy="365760"/>
-          </a:xfrm>
-          <a:prstGeom prst="rect">
-            <a:avLst/>
-          </a:prstGeom>
-          <a:solidFill>
-            <a:srgbClr val="02A37A"/>
-          </a:solidFill>
-          <a:ln w="12700">
-            <a:solidFill>
-              <a:srgbClr val="FFFFFF"/>
-            </a:solidFill>
-            <a:prstDash val="solid"/>
-          </a:ln>
-        </p:spPr>
-      </p:sp>
-      <p:sp>
-        <p:nvSpPr>
-          <p:cNvPr id="47" name="Text 45"/>
-          <p:cNvSpPr/>
-          <p:nvPr/>
-        </p:nvSpPr>
-        <p:spPr>
-          <a:xfrm>
-            <a:off x="4864913" y="4114800"/>
-            <a:ext cx="865327" cy="365760"/>
-          </a:xfrm>
-          <a:prstGeom prst="rect">
-            <a:avLst/>
-          </a:prstGeom>
-          <a:noFill/>
-          <a:ln/>
-        </p:spPr>
-        <p:txBody>
-          <a:bodyPr wrap="square" lIns="0" tIns="0" rIns="0" bIns="0" rtlCol="0" anchor="ctr"/>
-          <a:lstStyle/>
-          <a:p>
-            <a:pPr algn="ctr" indent="0" marL="0">
-              <a:buNone/>
-            </a:pPr>
-            <a:r>
-              <a:rPr lang="en-US" sz="950" b="1" dirty="0">
-                <a:solidFill>
-                  <a:srgbClr val="FFFFFF"/>
-                </a:solidFill>
-                <a:latin typeface="Calibri" pitchFamily="34" charset="0"/>
-                <a:ea typeface="Calibri" pitchFamily="34" charset="-122"/>
-                <a:cs typeface="Calibri" pitchFamily="34" charset="-120"/>
-              </a:rPr>
-              <a:t>Commit</a:t>
-            </a:r>
-            <a:endParaRPr lang="en-US" sz="950" dirty="0"/>
-          </a:p>
-        </p:txBody>
-      </p:sp>
-      <p:sp>
-        <p:nvSpPr>
-          <p:cNvPr id="48" name="Shape 46"/>
-          <p:cNvSpPr/>
-          <p:nvPr/>
-        </p:nvSpPr>
-        <p:spPr>
-          <a:xfrm>
-            <a:off x="5730240" y="4114800"/>
-            <a:ext cx="865327" cy="365760"/>
+          <p:cNvPr id="44" name="Shape 42"/>
+          <p:cNvSpPr/>
+          <p:nvPr/>
+        </p:nvSpPr>
+        <p:spPr>
+          <a:xfrm>
+            <a:off x="4292346" y="4114800"/>
+            <a:ext cx="1081659" cy="365760"/>
           </a:xfrm>
           <a:prstGeom prst="rect">
             <a:avLst/>
@@ -10652,14 +10439,14 @@
       </p:sp>
       <p:sp>
         <p:nvSpPr>
-          <p:cNvPr id="49" name="Text 47"/>
-          <p:cNvSpPr/>
-          <p:nvPr/>
-        </p:nvSpPr>
-        <p:spPr>
-          <a:xfrm>
-            <a:off x="5730240" y="4114800"/>
-            <a:ext cx="865327" cy="365760"/>
+          <p:cNvPr id="45" name="Text 43"/>
+          <p:cNvSpPr/>
+          <p:nvPr/>
+        </p:nvSpPr>
+        <p:spPr>
+          <a:xfrm>
+            <a:off x="4292346" y="4114800"/>
+            <a:ext cx="1081659" cy="365760"/>
           </a:xfrm>
           <a:prstGeom prst="rect">
             <a:avLst/>
@@ -10683,7 +10470,7 @@
                 <a:ea typeface="Calibri" pitchFamily="34" charset="-122"/>
                 <a:cs typeface="Calibri" pitchFamily="34" charset="-120"/>
               </a:rPr>
-              <a:t>Scan</a:t>
+              <a:t>Scan 16.7</a:t>
             </a:r>
             <a:endParaRPr lang="en-US" sz="950" dirty="0"/>
           </a:p>
@@ -10691,7 +10478,7 @@
       </p:sp>
       <p:sp>
         <p:nvSpPr>
-          <p:cNvPr id="50" name="Text 48"/>
+          <p:cNvPr id="46" name="Text 44"/>
           <p:cNvSpPr/>
           <p:nvPr/>
         </p:nvSpPr>
@@ -10722,7 +10509,7 @@
                 <a:ea typeface="Calibri" pitchFamily="34" charset="-122"/>
                 <a:cs typeface="Calibri" pitchFamily="34" charset="-120"/>
               </a:rPr>
-              <a:t>Alignment shown at its average. It is zero when the cameras happen to be in phase and a full frame when they are not.</a:t>
+              <a:t>41.1 ms is a lower bound: the panorama displays a matched set of six frames, which can be older than the frame timed from.</a:t>
             </a:r>
             <a:endParaRPr lang="en-US" sz="1000" dirty="0"/>
           </a:p>
@@ -10730,7 +10517,7 @@
       </p:sp>
       <p:sp>
         <p:nvSpPr>
-          <p:cNvPr id="51" name="Shape 49"/>
+          <p:cNvPr id="47" name="Shape 45"/>
           <p:cNvSpPr/>
           <p:nvPr/>
         </p:nvSpPr>
@@ -10757,7 +10544,7 @@
       </p:sp>
       <p:sp>
         <p:nvSpPr>
-          <p:cNvPr id="52" name="Text 50"/>
+          <p:cNvPr id="48" name="Text 46"/>
           <p:cNvSpPr/>
           <p:nvPr/>
         </p:nvSpPr>
@@ -10788,7 +10575,7 @@
                 <a:ea typeface="Cambria" pitchFamily="34" charset="-122"/>
                 <a:cs typeface="Cambria" pitchFamily="34" charset="-120"/>
               </a:rPr>
-              <a:t>67 ms</a:t>
+              <a:t>41 ms</a:t>
             </a:r>
             <a:endParaRPr lang="en-US" sz="2500" dirty="0"/>
           </a:p>
@@ -10796,7 +10583,7 @@
       </p:sp>
       <p:sp>
         <p:nvSpPr>
-          <p:cNvPr id="53" name="Text 51"/>
+          <p:cNvPr id="49" name="Text 47"/>
           <p:cNvSpPr/>
           <p:nvPr/>
         </p:nvSpPr>
@@ -10835,7 +10622,7 @@
       </p:sp>
       <p:sp>
         <p:nvSpPr>
-          <p:cNvPr id="54" name="Shape 52"/>
+          <p:cNvPr id="50" name="Shape 48"/>
           <p:cNvSpPr/>
           <p:nvPr/>
         </p:nvSpPr>
@@ -10862,7 +10649,7 @@
       </p:sp>
       <p:sp>
         <p:nvSpPr>
-          <p:cNvPr id="55" name="Text 53"/>
+          <p:cNvPr id="51" name="Text 49"/>
           <p:cNvSpPr/>
           <p:nvPr/>
         </p:nvSpPr>
@@ -10893,7 +10680,7 @@
                 <a:ea typeface="Cambria" pitchFamily="34" charset="-122"/>
                 <a:cs typeface="Cambria" pitchFamily="34" charset="-120"/>
               </a:rPr>
-              <a:t>167 ms</a:t>
+              <a:t>108 ms</a:t>
             </a:r>
             <a:endParaRPr lang="en-US" sz="2500" dirty="0"/>
           </a:p>
@@ -10901,7 +10688,7 @@
       </p:sp>
       <p:sp>
         <p:nvSpPr>
-          <p:cNvPr id="56" name="Text 54"/>
+          <p:cNvPr id="52" name="Text 50"/>
           <p:cNvSpPr/>
           <p:nvPr/>
         </p:nvSpPr>
@@ -10940,7 +10727,7 @@
       </p:sp>
       <p:sp>
         <p:nvSpPr>
-          <p:cNvPr id="57" name="Shape 55"/>
+          <p:cNvPr id="53" name="Shape 51"/>
           <p:cNvSpPr/>
           <p:nvPr/>
         </p:nvSpPr>
@@ -10967,7 +10754,7 @@
       </p:sp>
       <p:sp>
         <p:nvSpPr>
-          <p:cNvPr id="58" name="Text 56"/>
+          <p:cNvPr id="54" name="Text 52"/>
           <p:cNvSpPr/>
           <p:nvPr/>
         </p:nvSpPr>
@@ -10998,7 +10785,7 @@
                 <a:ea typeface="Cambria" pitchFamily="34" charset="-122"/>
                 <a:cs typeface="Cambria" pitchFamily="34" charset="-120"/>
               </a:rPr>
-              <a:t>117 ms  </a:t>
+              <a:t>75 ms  </a:t>
             </a:r>
             <a:pPr algn="ctr" indent="0" marL="0">
               <a:buNone/>
@@ -11020,7 +10807,7 @@
       </p:sp>
       <p:sp>
         <p:nvSpPr>
-          <p:cNvPr id="59" name="Shape 57"/>
+          <p:cNvPr id="55" name="Shape 53"/>
           <p:cNvSpPr/>
           <p:nvPr/>
         </p:nvSpPr>
@@ -11047,7 +10834,7 @@
       </p:sp>
       <p:sp>
         <p:nvSpPr>
-          <p:cNvPr id="60" name="Text 58"/>
+          <p:cNvPr id="56" name="Text 54"/>
           <p:cNvSpPr/>
           <p:nvPr/>
         </p:nvSpPr>
@@ -11092,7 +10879,7 @@
                 <a:ea typeface="Calibri" pitchFamily="34" charset="-122"/>
                 <a:cs typeface="Calibri" pitchFamily="34" charset="-120"/>
               </a:rPr>
-              <a:t>the EO cameras cannot be genlocked - the vendor confirmed their BT.1120 output is free-running - so the system must wait for six independently-timed frames to line up.</a:t>
+              <a:t>the EO cameras cannot be genlocked, so six independently-timed frames must line up. Measured 41.1 ms to publication and 15.03 new frames per second - half the cameras' output is discarded for want of a free buffer.</a:t>
             </a:r>
             <a:endParaRPr lang="en-US" sz="1200" dirty="0"/>
           </a:p>
@@ -11915,7 +11702,7 @@
                 <a:ea typeface="Calibri" pitchFamily="34" charset="-122"/>
                 <a:cs typeface="Calibri" pitchFamily="34" charset="-120"/>
               </a:rPr>
-              <a:t>33.3 ms</a:t>
+              <a:t>25.8 ms measured</a:t>
             </a:r>
             <a:endParaRPr lang="en-US" sz="1200" dirty="0"/>
           </a:p>
@@ -12435,7 +12222,7 @@
         <p:spPr>
           <a:xfrm>
             <a:off x="548640" y="4114800"/>
-            <a:ext cx="1725473" cy="365760"/>
+            <a:ext cx="1081659" cy="365760"/>
           </a:xfrm>
           <a:prstGeom prst="rect">
             <a:avLst/>
@@ -12460,7 +12247,7 @@
         <p:spPr>
           <a:xfrm>
             <a:off x="548640" y="4114800"/>
-            <a:ext cx="1725473" cy="365760"/>
+            <a:ext cx="1081659" cy="365760"/>
           </a:xfrm>
           <a:prstGeom prst="rect">
             <a:avLst/>
@@ -12484,7 +12271,7 @@
                 <a:ea typeface="Calibri" pitchFamily="34" charset="-122"/>
                 <a:cs typeface="Calibri" pitchFamily="34" charset="-120"/>
               </a:rPr>
-              <a:t>Ingest 33.3</a:t>
+              <a:t>Row age 16.7</a:t>
             </a:r>
             <a:endParaRPr lang="en-US" sz="950" dirty="0"/>
           </a:p>
@@ -12498,8 +12285,8 @@
         </p:nvSpPr>
         <p:spPr>
           <a:xfrm>
-            <a:off x="2274113" y="4114800"/>
-            <a:ext cx="1725473" cy="365760"/>
+            <a:off x="1630299" y="4114800"/>
+            <a:ext cx="3244977" cy="365760"/>
           </a:xfrm>
           <a:prstGeom prst="rect">
             <a:avLst/>
@@ -12523,8 +12310,8 @@
         </p:nvSpPr>
         <p:spPr>
           <a:xfrm>
-            <a:off x="2274113" y="4114800"/>
-            <a:ext cx="1725473" cy="365760"/>
+            <a:off x="1630299" y="4114800"/>
+            <a:ext cx="3244977" cy="365760"/>
           </a:xfrm>
           <a:prstGeom prst="rect">
             <a:avLst/>
@@ -12548,7 +12335,7 @@
                 <a:ea typeface="Calibri" pitchFamily="34" charset="-122"/>
                 <a:cs typeface="Calibri" pitchFamily="34" charset="-120"/>
               </a:rPr>
-              <a:t>Render 33.3</a:t>
+              <a:t>50.1 measured</a:t>
             </a:r>
             <a:endParaRPr lang="en-US" sz="950" dirty="0"/>
           </a:p>
@@ -12562,72 +12349,8 @@
         </p:nvSpPr>
         <p:spPr>
           <a:xfrm>
-            <a:off x="3999586" y="4114800"/>
-            <a:ext cx="865327" cy="365760"/>
-          </a:xfrm>
-          <a:prstGeom prst="rect">
-            <a:avLst/>
-          </a:prstGeom>
-          <a:solidFill>
-            <a:srgbClr val="02A37A"/>
-          </a:solidFill>
-          <a:ln w="12700">
-            <a:solidFill>
-              <a:srgbClr val="FFFFFF"/>
-            </a:solidFill>
-            <a:prstDash val="solid"/>
-          </a:ln>
-        </p:spPr>
-      </p:sp>
-      <p:sp>
-        <p:nvSpPr>
-          <p:cNvPr id="45" name="Text 43"/>
-          <p:cNvSpPr/>
-          <p:nvPr/>
-        </p:nvSpPr>
-        <p:spPr>
-          <a:xfrm>
-            <a:off x="3999586" y="4114800"/>
-            <a:ext cx="865327" cy="365760"/>
-          </a:xfrm>
-          <a:prstGeom prst="rect">
-            <a:avLst/>
-          </a:prstGeom>
-          <a:noFill/>
-          <a:ln/>
-        </p:spPr>
-        <p:txBody>
-          <a:bodyPr wrap="square" lIns="0" tIns="0" rIns="0" bIns="0" rtlCol="0" anchor="ctr"/>
-          <a:lstStyle/>
-          <a:p>
-            <a:pPr algn="ctr" indent="0" marL="0">
-              <a:buNone/>
-            </a:pPr>
-            <a:r>
-              <a:rPr lang="en-US" sz="950" b="1" dirty="0">
-                <a:solidFill>
-                  <a:srgbClr val="FFFFFF"/>
-                </a:solidFill>
-                <a:latin typeface="Calibri" pitchFamily="34" charset="0"/>
-                <a:ea typeface="Calibri" pitchFamily="34" charset="-122"/>
-                <a:cs typeface="Calibri" pitchFamily="34" charset="-120"/>
-              </a:rPr>
-              <a:t>Commit</a:t>
-            </a:r>
-            <a:endParaRPr lang="en-US" sz="950" dirty="0"/>
-          </a:p>
-        </p:txBody>
-      </p:sp>
-      <p:sp>
-        <p:nvSpPr>
-          <p:cNvPr id="46" name="Shape 44"/>
-          <p:cNvSpPr/>
-          <p:nvPr/>
-        </p:nvSpPr>
-        <p:spPr>
-          <a:xfrm>
-            <a:off x="4864913" y="4114800"/>
-            <a:ext cx="865327" cy="365760"/>
+            <a:off x="4875276" y="4114800"/>
+            <a:ext cx="1081659" cy="365760"/>
           </a:xfrm>
           <a:prstGeom prst="rect">
             <a:avLst/>
@@ -12645,14 +12368,14 @@
       </p:sp>
       <p:sp>
         <p:nvSpPr>
-          <p:cNvPr id="47" name="Text 45"/>
-          <p:cNvSpPr/>
-          <p:nvPr/>
-        </p:nvSpPr>
-        <p:spPr>
-          <a:xfrm>
-            <a:off x="4864913" y="4114800"/>
-            <a:ext cx="865327" cy="365760"/>
+          <p:cNvPr id="45" name="Text 43"/>
+          <p:cNvSpPr/>
+          <p:nvPr/>
+        </p:nvSpPr>
+        <p:spPr>
+          <a:xfrm>
+            <a:off x="4875276" y="4114800"/>
+            <a:ext cx="1081659" cy="365760"/>
           </a:xfrm>
           <a:prstGeom prst="rect">
             <a:avLst/>
@@ -12676,7 +12399,7 @@
                 <a:ea typeface="Calibri" pitchFamily="34" charset="-122"/>
                 <a:cs typeface="Calibri" pitchFamily="34" charset="-120"/>
               </a:rPr>
-              <a:t>Scan</a:t>
+              <a:t>Scan 16.7</a:t>
             </a:r>
             <a:endParaRPr lang="en-US" sz="950" dirty="0"/>
           </a:p>
@@ -12684,7 +12407,7 @@
       </p:sp>
       <p:sp>
         <p:nvSpPr>
-          <p:cNvPr id="48" name="Text 46"/>
+          <p:cNvPr id="46" name="Text 44"/>
           <p:cNvSpPr/>
           <p:nvPr/>
         </p:nvSpPr>
@@ -12723,7 +12446,7 @@
       </p:sp>
       <p:sp>
         <p:nvSpPr>
-          <p:cNvPr id="49" name="Shape 47"/>
+          <p:cNvPr id="47" name="Shape 45"/>
           <p:cNvSpPr/>
           <p:nvPr/>
         </p:nvSpPr>
@@ -12750,7 +12473,7 @@
       </p:sp>
       <p:sp>
         <p:nvSpPr>
-          <p:cNvPr id="50" name="Text 48"/>
+          <p:cNvPr id="48" name="Text 46"/>
           <p:cNvSpPr/>
           <p:nvPr/>
         </p:nvSpPr>
@@ -12781,7 +12504,7 @@
                 <a:ea typeface="Cambria" pitchFamily="34" charset="-122"/>
                 <a:cs typeface="Cambria" pitchFamily="34" charset="-120"/>
               </a:rPr>
-              <a:t>67 ms</a:t>
+              <a:t>50 ms</a:t>
             </a:r>
             <a:endParaRPr lang="en-US" sz="2500" dirty="0"/>
           </a:p>
@@ -12789,7 +12512,7 @@
       </p:sp>
       <p:sp>
         <p:nvSpPr>
-          <p:cNvPr id="51" name="Text 49"/>
+          <p:cNvPr id="49" name="Text 47"/>
           <p:cNvSpPr/>
           <p:nvPr/>
         </p:nvSpPr>
@@ -12828,7 +12551,7 @@
       </p:sp>
       <p:sp>
         <p:nvSpPr>
-          <p:cNvPr id="52" name="Shape 50"/>
+          <p:cNvPr id="50" name="Shape 48"/>
           <p:cNvSpPr/>
           <p:nvPr/>
         </p:nvSpPr>
@@ -12855,7 +12578,7 @@
       </p:sp>
       <p:sp>
         <p:nvSpPr>
-          <p:cNvPr id="53" name="Text 51"/>
+          <p:cNvPr id="51" name="Text 49"/>
           <p:cNvSpPr/>
           <p:nvPr/>
         </p:nvSpPr>
@@ -12886,7 +12609,7 @@
                 <a:ea typeface="Cambria" pitchFamily="34" charset="-122"/>
                 <a:cs typeface="Cambria" pitchFamily="34" charset="-120"/>
               </a:rPr>
-              <a:t>133 ms</a:t>
+              <a:t>117 ms</a:t>
             </a:r>
             <a:endParaRPr lang="en-US" sz="2500" dirty="0"/>
           </a:p>
@@ -12894,7 +12617,7 @@
       </p:sp>
       <p:sp>
         <p:nvSpPr>
-          <p:cNvPr id="54" name="Text 52"/>
+          <p:cNvPr id="52" name="Text 50"/>
           <p:cNvSpPr/>
           <p:nvPr/>
         </p:nvSpPr>
@@ -12933,7 +12656,7 @@
       </p:sp>
       <p:sp>
         <p:nvSpPr>
-          <p:cNvPr id="55" name="Shape 53"/>
+          <p:cNvPr id="53" name="Shape 51"/>
           <p:cNvSpPr/>
           <p:nvPr/>
         </p:nvSpPr>
@@ -12960,7 +12683,7 @@
       </p:sp>
       <p:sp>
         <p:nvSpPr>
-          <p:cNvPr id="56" name="Text 54"/>
+          <p:cNvPr id="54" name="Text 52"/>
           <p:cNvSpPr/>
           <p:nvPr/>
         </p:nvSpPr>
@@ -12991,7 +12714,7 @@
                 <a:ea typeface="Cambria" pitchFamily="34" charset="-122"/>
                 <a:cs typeface="Cambria" pitchFamily="34" charset="-120"/>
               </a:rPr>
-              <a:t>100 ms  </a:t>
+              <a:t>84 ms  </a:t>
             </a:r>
             <a:pPr algn="ctr" indent="0" marL="0">
               <a:buNone/>
@@ -13013,7 +12736,7 @@
       </p:sp>
       <p:sp>
         <p:nvSpPr>
-          <p:cNvPr id="57" name="Shape 55"/>
+          <p:cNvPr id="55" name="Shape 53"/>
           <p:cNvSpPr/>
           <p:nvPr/>
         </p:nvSpPr>
@@ -13040,7 +12763,7 @@
       </p:sp>
       <p:sp>
         <p:nvSpPr>
-          <p:cNvPr id="58" name="Text 56"/>
+          <p:cNvPr id="56" name="Text 54"/>
           <p:cNvSpPr/>
           <p:nvPr/>
         </p:nvSpPr>
@@ -13085,7 +12808,7 @@
                 <a:ea typeface="Calibri" pitchFamily="34" charset="-122"/>
                 <a:cs typeface="Calibri" pitchFamily="34" charset="-120"/>
               </a:rPr>
-              <a:t>the same store-and-forward structure as EO single. The frame store is on-chip rather than external, which removes a bandwidth risk but not a frame of latency.</a:t>
+              <a:t>the same store-and-forward structure as EO single, on-chip rather than external. Measured 50.1 ms to publication at a full 30.01 new frames per second.</a:t>
             </a:r>
             <a:endParaRPr lang="en-US" sz="1200" dirty="0"/>
           </a:p>
@@ -13908,7 +13631,7 @@
                 <a:ea typeface="Calibri" pitchFamily="34" charset="-122"/>
                 <a:cs typeface="Calibri" pitchFamily="34" charset="-120"/>
               </a:rPr>
-              <a:t>33.3 ms</a:t>
+              <a:t>41.6 ms measured</a:t>
             </a:r>
             <a:endParaRPr lang="en-US" sz="1200" dirty="0"/>
           </a:p>
@@ -14428,7 +14151,7 @@
         <p:spPr>
           <a:xfrm>
             <a:off x="548640" y="4114800"/>
-            <a:ext cx="128016" cy="365760"/>
+            <a:ext cx="1081659" cy="365760"/>
           </a:xfrm>
           <a:prstGeom prst="rect">
             <a:avLst/>
@@ -14446,14 +14169,53 @@
       </p:sp>
       <p:sp>
         <p:nvSpPr>
-          <p:cNvPr id="41" name="Shape 39"/>
-          <p:cNvSpPr/>
-          <p:nvPr/>
-        </p:nvSpPr>
-        <p:spPr>
-          <a:xfrm>
-            <a:off x="676656" y="4114800"/>
-            <a:ext cx="1725473" cy="365760"/>
+          <p:cNvPr id="41" name="Text 39"/>
+          <p:cNvSpPr/>
+          <p:nvPr/>
+        </p:nvSpPr>
+        <p:spPr>
+          <a:xfrm>
+            <a:off x="548640" y="4114800"/>
+            <a:ext cx="1081659" cy="365760"/>
+          </a:xfrm>
+          <a:prstGeom prst="rect">
+            <a:avLst/>
+          </a:prstGeom>
+          <a:noFill/>
+          <a:ln/>
+        </p:spPr>
+        <p:txBody>
+          <a:bodyPr wrap="square" lIns="0" tIns="0" rIns="0" bIns="0" rtlCol="0" anchor="ctr"/>
+          <a:lstStyle/>
+          <a:p>
+            <a:pPr algn="ctr" indent="0" marL="0">
+              <a:buNone/>
+            </a:pPr>
+            <a:r>
+              <a:rPr lang="en-US" sz="950" b="1" dirty="0">
+                <a:solidFill>
+                  <a:srgbClr val="FFFFFF"/>
+                </a:solidFill>
+                <a:latin typeface="Calibri" pitchFamily="34" charset="0"/>
+                <a:ea typeface="Calibri" pitchFamily="34" charset="-122"/>
+                <a:cs typeface="Calibri" pitchFamily="34" charset="-120"/>
+              </a:rPr>
+              <a:t>Row age 16.7</a:t>
+            </a:r>
+            <a:endParaRPr lang="en-US" sz="950" dirty="0"/>
+          </a:p>
+        </p:txBody>
+      </p:sp>
+      <p:sp>
+        <p:nvSpPr>
+          <p:cNvPr id="42" name="Shape 40"/>
+          <p:cNvSpPr/>
+          <p:nvPr/>
+        </p:nvSpPr>
+        <p:spPr>
+          <a:xfrm>
+            <a:off x="1630299" y="4114800"/>
+            <a:ext cx="2914650" cy="365760"/>
           </a:xfrm>
           <a:prstGeom prst="rect">
             <a:avLst/>
@@ -14471,14 +14233,14 @@
       </p:sp>
       <p:sp>
         <p:nvSpPr>
-          <p:cNvPr id="42" name="Text 40"/>
-          <p:cNvSpPr/>
-          <p:nvPr/>
-        </p:nvSpPr>
-        <p:spPr>
-          <a:xfrm>
-            <a:off x="676656" y="4114800"/>
-            <a:ext cx="1725473" cy="365760"/>
+          <p:cNvPr id="43" name="Text 41"/>
+          <p:cNvSpPr/>
+          <p:nvPr/>
+        </p:nvSpPr>
+        <p:spPr>
+          <a:xfrm>
+            <a:off x="1630299" y="4114800"/>
+            <a:ext cx="2914650" cy="365760"/>
           </a:xfrm>
           <a:prstGeom prst="rect">
             <a:avLst/>
@@ -14502,7 +14264,7 @@
                 <a:ea typeface="Calibri" pitchFamily="34" charset="-122"/>
                 <a:cs typeface="Calibri" pitchFamily="34" charset="-120"/>
               </a:rPr>
-              <a:t>Render 33.3  -  overlapped with ingest</a:t>
+              <a:t>45.0 measured</a:t>
             </a:r>
             <a:endParaRPr lang="en-US" sz="950" dirty="0"/>
           </a:p>
@@ -14510,78 +14272,14 @@
       </p:sp>
       <p:sp>
         <p:nvSpPr>
-          <p:cNvPr id="43" name="Shape 41"/>
-          <p:cNvSpPr/>
-          <p:nvPr/>
-        </p:nvSpPr>
-        <p:spPr>
-          <a:xfrm>
-            <a:off x="2402129" y="4114800"/>
-            <a:ext cx="865327" cy="365760"/>
-          </a:xfrm>
-          <a:prstGeom prst="rect">
-            <a:avLst/>
-          </a:prstGeom>
-          <a:solidFill>
-            <a:srgbClr val="02A37A"/>
-          </a:solidFill>
-          <a:ln w="12700">
-            <a:solidFill>
-              <a:srgbClr val="FFFFFF"/>
-            </a:solidFill>
-            <a:prstDash val="solid"/>
-          </a:ln>
-        </p:spPr>
-      </p:sp>
-      <p:sp>
-        <p:nvSpPr>
-          <p:cNvPr id="44" name="Text 42"/>
-          <p:cNvSpPr/>
-          <p:nvPr/>
-        </p:nvSpPr>
-        <p:spPr>
-          <a:xfrm>
-            <a:off x="2402129" y="4114800"/>
-            <a:ext cx="865327" cy="365760"/>
-          </a:xfrm>
-          <a:prstGeom prst="rect">
-            <a:avLst/>
-          </a:prstGeom>
-          <a:noFill/>
-          <a:ln/>
-        </p:spPr>
-        <p:txBody>
-          <a:bodyPr wrap="square" lIns="0" tIns="0" rIns="0" bIns="0" rtlCol="0" anchor="ctr"/>
-          <a:lstStyle/>
-          <a:p>
-            <a:pPr algn="ctr" indent="0" marL="0">
-              <a:buNone/>
-            </a:pPr>
-            <a:r>
-              <a:rPr lang="en-US" sz="950" b="1" dirty="0">
-                <a:solidFill>
-                  <a:srgbClr val="FFFFFF"/>
-                </a:solidFill>
-                <a:latin typeface="Calibri" pitchFamily="34" charset="0"/>
-                <a:ea typeface="Calibri" pitchFamily="34" charset="-122"/>
-                <a:cs typeface="Calibri" pitchFamily="34" charset="-120"/>
-              </a:rPr>
-              <a:t>Commit</a:t>
-            </a:r>
-            <a:endParaRPr lang="en-US" sz="950" dirty="0"/>
-          </a:p>
-        </p:txBody>
-      </p:sp>
-      <p:sp>
-        <p:nvSpPr>
-          <p:cNvPr id="45" name="Shape 43"/>
-          <p:cNvSpPr/>
-          <p:nvPr/>
-        </p:nvSpPr>
-        <p:spPr>
-          <a:xfrm>
-            <a:off x="3267456" y="4114800"/>
-            <a:ext cx="865327" cy="365760"/>
+          <p:cNvPr id="44" name="Shape 42"/>
+          <p:cNvSpPr/>
+          <p:nvPr/>
+        </p:nvSpPr>
+        <p:spPr>
+          <a:xfrm>
+            <a:off x="4544949" y="4114800"/>
+            <a:ext cx="1081659" cy="365760"/>
           </a:xfrm>
           <a:prstGeom prst="rect">
             <a:avLst/>
@@ -14599,46 +14297,46 @@
       </p:sp>
       <p:sp>
         <p:nvSpPr>
+          <p:cNvPr id="45" name="Text 43"/>
+          <p:cNvSpPr/>
+          <p:nvPr/>
+        </p:nvSpPr>
+        <p:spPr>
+          <a:xfrm>
+            <a:off x="4544949" y="4114800"/>
+            <a:ext cx="1081659" cy="365760"/>
+          </a:xfrm>
+          <a:prstGeom prst="rect">
+            <a:avLst/>
+          </a:prstGeom>
+          <a:noFill/>
+          <a:ln/>
+        </p:spPr>
+        <p:txBody>
+          <a:bodyPr wrap="square" lIns="0" tIns="0" rIns="0" bIns="0" rtlCol="0" anchor="ctr"/>
+          <a:lstStyle/>
+          <a:p>
+            <a:pPr algn="ctr" indent="0" marL="0">
+              <a:buNone/>
+            </a:pPr>
+            <a:r>
+              <a:rPr lang="en-US" sz="950" b="1" dirty="0">
+                <a:solidFill>
+                  <a:srgbClr val="FFFFFF"/>
+                </a:solidFill>
+                <a:latin typeface="Calibri" pitchFamily="34" charset="0"/>
+                <a:ea typeface="Calibri" pitchFamily="34" charset="-122"/>
+                <a:cs typeface="Calibri" pitchFamily="34" charset="-120"/>
+              </a:rPr>
+              <a:t>Scan 16.7</a:t>
+            </a:r>
+            <a:endParaRPr lang="en-US" sz="950" dirty="0"/>
+          </a:p>
+        </p:txBody>
+      </p:sp>
+      <p:sp>
+        <p:nvSpPr>
           <p:cNvPr id="46" name="Text 44"/>
-          <p:cNvSpPr/>
-          <p:nvPr/>
-        </p:nvSpPr>
-        <p:spPr>
-          <a:xfrm>
-            <a:off x="3267456" y="4114800"/>
-            <a:ext cx="865327" cy="365760"/>
-          </a:xfrm>
-          <a:prstGeom prst="rect">
-            <a:avLst/>
-          </a:prstGeom>
-          <a:noFill/>
-          <a:ln/>
-        </p:spPr>
-        <p:txBody>
-          <a:bodyPr wrap="square" lIns="0" tIns="0" rIns="0" bIns="0" rtlCol="0" anchor="ctr"/>
-          <a:lstStyle/>
-          <a:p>
-            <a:pPr algn="ctr" indent="0" marL="0">
-              <a:buNone/>
-            </a:pPr>
-            <a:r>
-              <a:rPr lang="en-US" sz="950" b="1" dirty="0">
-                <a:solidFill>
-                  <a:srgbClr val="FFFFFF"/>
-                </a:solidFill>
-                <a:latin typeface="Calibri" pitchFamily="34" charset="0"/>
-                <a:ea typeface="Calibri" pitchFamily="34" charset="-122"/>
-                <a:cs typeface="Calibri" pitchFamily="34" charset="-120"/>
-              </a:rPr>
-              <a:t>Scan</a:t>
-            </a:r>
-            <a:endParaRPr lang="en-US" sz="950" dirty="0"/>
-          </a:p>
-        </p:txBody>
-      </p:sp>
-      <p:sp>
-        <p:nvSpPr>
-          <p:cNvPr id="47" name="Text 45"/>
           <p:cNvSpPr/>
           <p:nvPr/>
         </p:nvSpPr>
@@ -14669,7 +14367,7 @@
                 <a:ea typeface="Calibri" pitchFamily="34" charset="-122"/>
                 <a:cs typeface="Calibri" pitchFamily="34" charset="-120"/>
               </a:rPr>
-              <a:t>Rendering runs concurrently with ingest rather than after it - this is where the saving comes from.</a:t>
+              <a:t>Measured immediately after programming, the only state in which this mode currently runs.</a:t>
             </a:r>
             <a:endParaRPr lang="en-US" sz="1000" dirty="0"/>
           </a:p>
@@ -14677,7 +14375,7 @@
       </p:sp>
       <p:sp>
         <p:nvSpPr>
-          <p:cNvPr id="48" name="Shape 46"/>
+          <p:cNvPr id="47" name="Shape 45"/>
           <p:cNvSpPr/>
           <p:nvPr/>
         </p:nvSpPr>
@@ -14704,7 +14402,7 @@
       </p:sp>
       <p:sp>
         <p:nvSpPr>
-          <p:cNvPr id="49" name="Text 47"/>
+          <p:cNvPr id="48" name="Text 46"/>
           <p:cNvSpPr/>
           <p:nvPr/>
         </p:nvSpPr>
@@ -14735,7 +14433,7 @@
                 <a:ea typeface="Cambria" pitchFamily="34" charset="-122"/>
                 <a:cs typeface="Cambria" pitchFamily="34" charset="-120"/>
               </a:rPr>
-              <a:t>36 ms</a:t>
+              <a:t>45 ms</a:t>
             </a:r>
             <a:endParaRPr lang="en-US" sz="2500" dirty="0"/>
           </a:p>
@@ -14743,7 +14441,7 @@
       </p:sp>
       <p:sp>
         <p:nvSpPr>
-          <p:cNvPr id="50" name="Text 48"/>
+          <p:cNvPr id="49" name="Text 47"/>
           <p:cNvSpPr/>
           <p:nvPr/>
         </p:nvSpPr>
@@ -14782,7 +14480,7 @@
       </p:sp>
       <p:sp>
         <p:nvSpPr>
-          <p:cNvPr id="51" name="Shape 49"/>
+          <p:cNvPr id="50" name="Shape 48"/>
           <p:cNvSpPr/>
           <p:nvPr/>
         </p:nvSpPr>
@@ -14809,7 +14507,7 @@
       </p:sp>
       <p:sp>
         <p:nvSpPr>
-          <p:cNvPr id="52" name="Text 50"/>
+          <p:cNvPr id="51" name="Text 49"/>
           <p:cNvSpPr/>
           <p:nvPr/>
         </p:nvSpPr>
@@ -14840,7 +14538,7 @@
                 <a:ea typeface="Cambria" pitchFamily="34" charset="-122"/>
                 <a:cs typeface="Cambria" pitchFamily="34" charset="-120"/>
               </a:rPr>
-              <a:t>102 ms</a:t>
+              <a:t>112 ms</a:t>
             </a:r>
             <a:endParaRPr lang="en-US" sz="2500" dirty="0"/>
           </a:p>
@@ -14848,7 +14546,7 @@
       </p:sp>
       <p:sp>
         <p:nvSpPr>
-          <p:cNvPr id="53" name="Text 51"/>
+          <p:cNvPr id="52" name="Text 50"/>
           <p:cNvSpPr/>
           <p:nvPr/>
         </p:nvSpPr>
@@ -14887,7 +14585,7 @@
       </p:sp>
       <p:sp>
         <p:nvSpPr>
-          <p:cNvPr id="54" name="Shape 52"/>
+          <p:cNvPr id="53" name="Shape 51"/>
           <p:cNvSpPr/>
           <p:nvPr/>
         </p:nvSpPr>
@@ -14914,7 +14612,7 @@
       </p:sp>
       <p:sp>
         <p:nvSpPr>
-          <p:cNvPr id="55" name="Text 53"/>
+          <p:cNvPr id="54" name="Text 52"/>
           <p:cNvSpPr/>
           <p:nvPr/>
         </p:nvSpPr>
@@ -14945,7 +14643,7 @@
                 <a:ea typeface="Cambria" pitchFamily="34" charset="-122"/>
                 <a:cs typeface="Cambria" pitchFamily="34" charset="-120"/>
               </a:rPr>
-              <a:t>69 ms  </a:t>
+              <a:t>78 ms  </a:t>
             </a:r>
             <a:pPr algn="ctr" indent="0" marL="0">
               <a:buNone/>
@@ -14967,7 +14665,7 @@
       </p:sp>
       <p:sp>
         <p:nvSpPr>
-          <p:cNvPr id="56" name="Shape 54"/>
+          <p:cNvPr id="55" name="Shape 53"/>
           <p:cNvSpPr/>
           <p:nvPr/>
         </p:nvSpPr>
@@ -14982,11 +14680,11 @@
             </a:avLst>
           </a:prstGeom>
           <a:solidFill>
-            <a:srgbClr val="DAF2EB"/>
+            <a:srgbClr val="F6E7DE"/>
           </a:solidFill>
           <a:ln w="12700">
             <a:solidFill>
-              <a:srgbClr val="02A37A"/>
+              <a:srgbClr val="C1663A"/>
             </a:solidFill>
             <a:prstDash val="solid"/>
           </a:ln>
@@ -14994,7 +14692,7 @@
       </p:sp>
       <p:sp>
         <p:nvSpPr>
-          <p:cNvPr id="57" name="Text 55"/>
+          <p:cNvPr id="56" name="Text 54"/>
           <p:cNvSpPr/>
           <p:nvPr/>
         </p:nvSpPr>
@@ -15025,7 +14723,7 @@
                 <a:ea typeface="Calibri" pitchFamily="34" charset="-122"/>
                 <a:cs typeface="Calibri" pitchFamily="34" charset="-120"/>
               </a:rPr>
-              <a:t>A full frame faster.  </a:t>
+              <a:t>Works from boot, stops on a mode switch.  </a:t>
             </a:r>
             <a:pPr indent="0" marL="0">
               <a:buNone/>
@@ -15039,7 +14737,7 @@
                 <a:ea typeface="Calibri" pitchFamily="34" charset="-122"/>
                 <a:cs typeface="Calibri" pitchFamily="34" charset="-120"/>
               </a:rPr>
-              <a:t>Genlocking removes the alignment wait, and starting the render 35 source rows in removes the store-and-forward frame. This is the architecture the other modes would adopt to close the gap.</a:t>
+              <a:t>Measured 45.0 ms and 15.03 new frames per second immediately after programming. After any change of mode it commits nothing at all, and no camera-side recovery restores it - the part must be reprogrammed.</a:t>
             </a:r>
             <a:endParaRPr lang="en-US" sz="1200" dirty="0"/>
           </a:p>
@@ -15188,7 +14886,7 @@
                 <a:ea typeface="Calibri" pitchFamily="34" charset="-122"/>
                 <a:cs typeface="Calibri" pitchFamily="34" charset="-120"/>
               </a:rPr>
-              <a:t>Figures are FPGA-internal. Camera sensor and ISP delay is additional and is the camera vendor's specification.</a:t>
+              <a:t>Measured on hardware, 2026-08-19. FPGA-internal; camera sensor and ISP delay is additional and is the vendor's specification.</a:t>
             </a:r>
             <a:endParaRPr lang="en-US" sz="1250" dirty="0"/>
           </a:p>
@@ -15529,7 +15227,691 @@
                           <a:ea typeface="Calibri" pitchFamily="34" charset="-122"/>
                           <a:cs typeface="Calibri" pitchFamily="34" charset="-120"/>
                         </a:rPr>
-                        <a:t>Dominant cost</a:t>
+                        <a:t>New frames/s</a:t>
+                      </a:r>
+                      <a:endParaRPr lang="en-US" sz="1050" dirty="0">
+                        <a:latin typeface="Calibri" charset="0"/>
+                        <a:ea typeface="Calibri" charset="0"/>
+                        <a:cs typeface="Calibri" charset="0"/>
+                      </a:endParaRPr>
+                    </a:p>
+                  </a:txBody>
+                  <a:tcPr marL="91440" marR="91440" marT="45720" marB="45720" anchor="ctr">
+                    <a:lnL w="12700" cap="flat" cmpd="sng" algn="ctr">
+                      <a:solidFill>
+                        <a:srgbClr val="D3DCEA"/>
+                      </a:solidFill>
+                      <a:prstDash val="solid"/>
+                      <a:round/>
+                      <a:headEnd type="none" w="med" len="med"/>
+                      <a:tailEnd type="none" w="med" len="med"/>
+                    </a:lnL>
+                    <a:lnR w="12700" cap="flat" cmpd="sng" algn="ctr">
+                      <a:solidFill>
+                        <a:srgbClr val="D3DCEA"/>
+                      </a:solidFill>
+                      <a:prstDash val="solid"/>
+                      <a:round/>
+                      <a:headEnd type="none" w="med" len="med"/>
+                      <a:tailEnd type="none" w="med" len="med"/>
+                    </a:lnR>
+                    <a:lnT w="12700" cap="flat" cmpd="sng" algn="ctr">
+                      <a:solidFill>
+                        <a:srgbClr val="D3DCEA"/>
+                      </a:solidFill>
+                      <a:prstDash val="solid"/>
+                      <a:round/>
+                      <a:headEnd type="none" w="med" len="med"/>
+                      <a:tailEnd type="none" w="med" len="med"/>
+                    </a:lnT>
+                    <a:lnB w="12700" cap="flat" cmpd="sng" algn="ctr">
+                      <a:solidFill>
+                        <a:srgbClr val="D3DCEA"/>
+                      </a:solidFill>
+                      <a:prstDash val="solid"/>
+                      <a:round/>
+                      <a:headEnd type="none" w="med" len="med"/>
+                      <a:tailEnd type="none" w="med" len="med"/>
+                    </a:lnB>
+                    <a:solidFill>
+                      <a:srgbClr val="FFFFFF"/>
+                    </a:solidFill>
+                  </a:tcPr>
+                </a:tc>
+              </a:tr>
+              <a:tr h="384048">
+                <a:tc>
+                  <a:txBody>
+                    <a:bodyPr/>
+                    <a:lstStyle/>
+                    <a:p>
+                      <a:pPr indent="0" marL="0">
+                        <a:buNone/>
+                      </a:pPr>
+                      <a:r>
+                        <a:rPr lang="en-US" sz="1050" dirty="0">
+                          <a:solidFill>
+                            <a:srgbClr val="27374F"/>
+                          </a:solidFill>
+                          <a:latin typeface="Calibri" pitchFamily="34" charset="0"/>
+                          <a:ea typeface="Calibri" pitchFamily="34" charset="-122"/>
+                          <a:cs typeface="Calibri" pitchFamily="34" charset="-120"/>
+                        </a:rPr>
+                        <a:t>EO single</a:t>
+                      </a:r>
+                      <a:endParaRPr lang="en-US" sz="1050" dirty="0">
+                        <a:latin typeface="Calibri" charset="0"/>
+                        <a:ea typeface="Calibri" charset="0"/>
+                        <a:cs typeface="Calibri" charset="0"/>
+                      </a:endParaRPr>
+                    </a:p>
+                  </a:txBody>
+                  <a:tcPr marL="91440" marR="91440" marT="45720" marB="45720" anchor="ctr">
+                    <a:lnL w="12700" cap="flat" cmpd="sng" algn="ctr">
+                      <a:solidFill>
+                        <a:srgbClr val="D3DCEA"/>
+                      </a:solidFill>
+                      <a:prstDash val="solid"/>
+                      <a:round/>
+                      <a:headEnd type="none" w="med" len="med"/>
+                      <a:tailEnd type="none" w="med" len="med"/>
+                    </a:lnL>
+                    <a:lnR w="12700" cap="flat" cmpd="sng" algn="ctr">
+                      <a:solidFill>
+                        <a:srgbClr val="D3DCEA"/>
+                      </a:solidFill>
+                      <a:prstDash val="solid"/>
+                      <a:round/>
+                      <a:headEnd type="none" w="med" len="med"/>
+                      <a:tailEnd type="none" w="med" len="med"/>
+                    </a:lnR>
+                    <a:lnT w="12700" cap="flat" cmpd="sng" algn="ctr">
+                      <a:solidFill>
+                        <a:srgbClr val="D3DCEA"/>
+                      </a:solidFill>
+                      <a:prstDash val="solid"/>
+                      <a:round/>
+                      <a:headEnd type="none" w="med" len="med"/>
+                      <a:tailEnd type="none" w="med" len="med"/>
+                    </a:lnT>
+                    <a:lnB w="12700" cap="flat" cmpd="sng" algn="ctr">
+                      <a:solidFill>
+                        <a:srgbClr val="D3DCEA"/>
+                      </a:solidFill>
+                      <a:prstDash val="solid"/>
+                      <a:round/>
+                      <a:headEnd type="none" w="med" len="med"/>
+                      <a:tailEnd type="none" w="med" len="med"/>
+                    </a:lnB>
+                    <a:solidFill>
+                      <a:srgbClr val="FFFFFF"/>
+                    </a:solidFill>
+                  </a:tcPr>
+                </a:tc>
+                <a:tc>
+                  <a:txBody>
+                    <a:bodyPr/>
+                    <a:lstStyle/>
+                    <a:p>
+                      <a:pPr indent="0" marL="0">
+                        <a:buNone/>
+                      </a:pPr>
+                      <a:r>
+                        <a:rPr lang="en-US" sz="1050" dirty="0">
+                          <a:solidFill>
+                            <a:srgbClr val="27374F"/>
+                          </a:solidFill>
+                          <a:latin typeface="Calibri" pitchFamily="34" charset="0"/>
+                          <a:ea typeface="Calibri" pitchFamily="34" charset="-122"/>
+                          <a:cs typeface="Calibri" pitchFamily="34" charset="-120"/>
+                        </a:rPr>
+                        <a:t>16 ms</a:t>
+                      </a:r>
+                      <a:endParaRPr lang="en-US" sz="1050" dirty="0">
+                        <a:latin typeface="Calibri" charset="0"/>
+                        <a:ea typeface="Calibri" charset="0"/>
+                        <a:cs typeface="Calibri" charset="0"/>
+                      </a:endParaRPr>
+                    </a:p>
+                  </a:txBody>
+                  <a:tcPr marL="91440" marR="91440" marT="45720" marB="45720" anchor="ctr">
+                    <a:lnL w="12700" cap="flat" cmpd="sng" algn="ctr">
+                      <a:solidFill>
+                        <a:srgbClr val="D3DCEA"/>
+                      </a:solidFill>
+                      <a:prstDash val="solid"/>
+                      <a:round/>
+                      <a:headEnd type="none" w="med" len="med"/>
+                      <a:tailEnd type="none" w="med" len="med"/>
+                    </a:lnL>
+                    <a:lnR w="12700" cap="flat" cmpd="sng" algn="ctr">
+                      <a:solidFill>
+                        <a:srgbClr val="D3DCEA"/>
+                      </a:solidFill>
+                      <a:prstDash val="solid"/>
+                      <a:round/>
+                      <a:headEnd type="none" w="med" len="med"/>
+                      <a:tailEnd type="none" w="med" len="med"/>
+                    </a:lnR>
+                    <a:lnT w="12700" cap="flat" cmpd="sng" algn="ctr">
+                      <a:solidFill>
+                        <a:srgbClr val="D3DCEA"/>
+                      </a:solidFill>
+                      <a:prstDash val="solid"/>
+                      <a:round/>
+                      <a:headEnd type="none" w="med" len="med"/>
+                      <a:tailEnd type="none" w="med" len="med"/>
+                    </a:lnT>
+                    <a:lnB w="12700" cap="flat" cmpd="sng" algn="ctr">
+                      <a:solidFill>
+                        <a:srgbClr val="D3DCEA"/>
+                      </a:solidFill>
+                      <a:prstDash val="solid"/>
+                      <a:round/>
+                      <a:headEnd type="none" w="med" len="med"/>
+                      <a:tailEnd type="none" w="med" len="med"/>
+                    </a:lnB>
+                    <a:solidFill>
+                      <a:srgbClr val="FFFFFF"/>
+                    </a:solidFill>
+                  </a:tcPr>
+                </a:tc>
+                <a:tc>
+                  <a:txBody>
+                    <a:bodyPr/>
+                    <a:lstStyle/>
+                    <a:p>
+                      <a:pPr indent="0" marL="0">
+                        <a:buNone/>
+                      </a:pPr>
+                      <a:r>
+                        <a:rPr lang="en-US" sz="1050" dirty="0">
+                          <a:solidFill>
+                            <a:srgbClr val="27374F"/>
+                          </a:solidFill>
+                          <a:latin typeface="Calibri" pitchFamily="34" charset="0"/>
+                          <a:ea typeface="Calibri" pitchFamily="34" charset="-122"/>
+                          <a:cs typeface="Calibri" pitchFamily="34" charset="-120"/>
+                        </a:rPr>
+                        <a:t>50 ms</a:t>
+                      </a:r>
+                      <a:endParaRPr lang="en-US" sz="1050" dirty="0">
+                        <a:latin typeface="Calibri" charset="0"/>
+                        <a:ea typeface="Calibri" charset="0"/>
+                        <a:cs typeface="Calibri" charset="0"/>
+                      </a:endParaRPr>
+                    </a:p>
+                  </a:txBody>
+                  <a:tcPr marL="91440" marR="91440" marT="45720" marB="45720" anchor="ctr">
+                    <a:lnL w="12700" cap="flat" cmpd="sng" algn="ctr">
+                      <a:solidFill>
+                        <a:srgbClr val="D3DCEA"/>
+                      </a:solidFill>
+                      <a:prstDash val="solid"/>
+                      <a:round/>
+                      <a:headEnd type="none" w="med" len="med"/>
+                      <a:tailEnd type="none" w="med" len="med"/>
+                    </a:lnL>
+                    <a:lnR w="12700" cap="flat" cmpd="sng" algn="ctr">
+                      <a:solidFill>
+                        <a:srgbClr val="D3DCEA"/>
+                      </a:solidFill>
+                      <a:prstDash val="solid"/>
+                      <a:round/>
+                      <a:headEnd type="none" w="med" len="med"/>
+                      <a:tailEnd type="none" w="med" len="med"/>
+                    </a:lnR>
+                    <a:lnT w="12700" cap="flat" cmpd="sng" algn="ctr">
+                      <a:solidFill>
+                        <a:srgbClr val="D3DCEA"/>
+                      </a:solidFill>
+                      <a:prstDash val="solid"/>
+                      <a:round/>
+                      <a:headEnd type="none" w="med" len="med"/>
+                      <a:tailEnd type="none" w="med" len="med"/>
+                    </a:lnT>
+                    <a:lnB w="12700" cap="flat" cmpd="sng" algn="ctr">
+                      <a:solidFill>
+                        <a:srgbClr val="D3DCEA"/>
+                      </a:solidFill>
+                      <a:prstDash val="solid"/>
+                      <a:round/>
+                      <a:headEnd type="none" w="med" len="med"/>
+                      <a:tailEnd type="none" w="med" len="med"/>
+                    </a:lnB>
+                    <a:solidFill>
+                      <a:srgbClr val="FFFFFF"/>
+                    </a:solidFill>
+                  </a:tcPr>
+                </a:tc>
+                <a:tc>
+                  <a:txBody>
+                    <a:bodyPr/>
+                    <a:lstStyle/>
+                    <a:p>
+                      <a:pPr indent="0" marL="0">
+                        <a:buNone/>
+                      </a:pPr>
+                      <a:r>
+                        <a:rPr lang="en-US" sz="1050" dirty="0">
+                          <a:solidFill>
+                            <a:srgbClr val="27374F"/>
+                          </a:solidFill>
+                          <a:latin typeface="Calibri" pitchFamily="34" charset="0"/>
+                          <a:ea typeface="Calibri" pitchFamily="34" charset="-122"/>
+                          <a:cs typeface="Calibri" pitchFamily="34" charset="-120"/>
+                        </a:rPr>
+                        <a:t>83 ms</a:t>
+                      </a:r>
+                      <a:endParaRPr lang="en-US" sz="1050" dirty="0">
+                        <a:latin typeface="Calibri" charset="0"/>
+                        <a:ea typeface="Calibri" charset="0"/>
+                        <a:cs typeface="Calibri" charset="0"/>
+                      </a:endParaRPr>
+                    </a:p>
+                  </a:txBody>
+                  <a:tcPr marL="91440" marR="91440" marT="45720" marB="45720" anchor="ctr">
+                    <a:lnL w="12700" cap="flat" cmpd="sng" algn="ctr">
+                      <a:solidFill>
+                        <a:srgbClr val="D3DCEA"/>
+                      </a:solidFill>
+                      <a:prstDash val="solid"/>
+                      <a:round/>
+                      <a:headEnd type="none" w="med" len="med"/>
+                      <a:tailEnd type="none" w="med" len="med"/>
+                    </a:lnL>
+                    <a:lnR w="12700" cap="flat" cmpd="sng" algn="ctr">
+                      <a:solidFill>
+                        <a:srgbClr val="D3DCEA"/>
+                      </a:solidFill>
+                      <a:prstDash val="solid"/>
+                      <a:round/>
+                      <a:headEnd type="none" w="med" len="med"/>
+                      <a:tailEnd type="none" w="med" len="med"/>
+                    </a:lnR>
+                    <a:lnT w="12700" cap="flat" cmpd="sng" algn="ctr">
+                      <a:solidFill>
+                        <a:srgbClr val="D3DCEA"/>
+                      </a:solidFill>
+                      <a:prstDash val="solid"/>
+                      <a:round/>
+                      <a:headEnd type="none" w="med" len="med"/>
+                      <a:tailEnd type="none" w="med" len="med"/>
+                    </a:lnT>
+                    <a:lnB w="12700" cap="flat" cmpd="sng" algn="ctr">
+                      <a:solidFill>
+                        <a:srgbClr val="D3DCEA"/>
+                      </a:solidFill>
+                      <a:prstDash val="solid"/>
+                      <a:round/>
+                      <a:headEnd type="none" w="med" len="med"/>
+                      <a:tailEnd type="none" w="med" len="med"/>
+                    </a:lnB>
+                    <a:solidFill>
+                      <a:srgbClr val="FFFFFF"/>
+                    </a:solidFill>
+                  </a:tcPr>
+                </a:tc>
+                <a:tc>
+                  <a:txBody>
+                    <a:bodyPr/>
+                    <a:lstStyle/>
+                    <a:p>
+                      <a:pPr indent="0" marL="0">
+                        <a:buNone/>
+                      </a:pPr>
+                      <a:r>
+                        <a:rPr lang="en-US" sz="1050" dirty="0">
+                          <a:solidFill>
+                            <a:srgbClr val="27374F"/>
+                          </a:solidFill>
+                          <a:latin typeface="Calibri" pitchFamily="34" charset="0"/>
+                          <a:ea typeface="Calibri" pitchFamily="34" charset="-122"/>
+                          <a:cs typeface="Calibri" pitchFamily="34" charset="-120"/>
+                        </a:rPr>
+                        <a:t>29.75</a:t>
+                      </a:r>
+                      <a:endParaRPr lang="en-US" sz="1050" dirty="0">
+                        <a:latin typeface="Calibri" charset="0"/>
+                        <a:ea typeface="Calibri" charset="0"/>
+                        <a:cs typeface="Calibri" charset="0"/>
+                      </a:endParaRPr>
+                    </a:p>
+                  </a:txBody>
+                  <a:tcPr marL="91440" marR="91440" marT="45720" marB="45720" anchor="ctr">
+                    <a:lnL w="12700" cap="flat" cmpd="sng" algn="ctr">
+                      <a:solidFill>
+                        <a:srgbClr val="D3DCEA"/>
+                      </a:solidFill>
+                      <a:prstDash val="solid"/>
+                      <a:round/>
+                      <a:headEnd type="none" w="med" len="med"/>
+                      <a:tailEnd type="none" w="med" len="med"/>
+                    </a:lnL>
+                    <a:lnR w="12700" cap="flat" cmpd="sng" algn="ctr">
+                      <a:solidFill>
+                        <a:srgbClr val="D3DCEA"/>
+                      </a:solidFill>
+                      <a:prstDash val="solid"/>
+                      <a:round/>
+                      <a:headEnd type="none" w="med" len="med"/>
+                      <a:tailEnd type="none" w="med" len="med"/>
+                    </a:lnR>
+                    <a:lnT w="12700" cap="flat" cmpd="sng" algn="ctr">
+                      <a:solidFill>
+                        <a:srgbClr val="D3DCEA"/>
+                      </a:solidFill>
+                      <a:prstDash val="solid"/>
+                      <a:round/>
+                      <a:headEnd type="none" w="med" len="med"/>
+                      <a:tailEnd type="none" w="med" len="med"/>
+                    </a:lnT>
+                    <a:lnB w="12700" cap="flat" cmpd="sng" algn="ctr">
+                      <a:solidFill>
+                        <a:srgbClr val="D3DCEA"/>
+                      </a:solidFill>
+                      <a:prstDash val="solid"/>
+                      <a:round/>
+                      <a:headEnd type="none" w="med" len="med"/>
+                      <a:tailEnd type="none" w="med" len="med"/>
+                    </a:lnB>
+                    <a:solidFill>
+                      <a:srgbClr val="FFFFFF"/>
+                    </a:solidFill>
+                  </a:tcPr>
+                </a:tc>
+              </a:tr>
+              <a:tr h="384048">
+                <a:tc>
+                  <a:txBody>
+                    <a:bodyPr/>
+                    <a:lstStyle/>
+                    <a:p>
+                      <a:pPr indent="0" marL="0">
+                        <a:buNone/>
+                      </a:pPr>
+                      <a:r>
+                        <a:rPr lang="en-US" sz="1050" dirty="0">
+                          <a:solidFill>
+                            <a:srgbClr val="27374F"/>
+                          </a:solidFill>
+                          <a:latin typeface="Calibri" pitchFamily="34" charset="0"/>
+                          <a:ea typeface="Calibri" pitchFamily="34" charset="-122"/>
+                          <a:cs typeface="Calibri" pitchFamily="34" charset="-120"/>
+                        </a:rPr>
+                        <a:t>EO panorama</a:t>
+                      </a:r>
+                      <a:endParaRPr lang="en-US" sz="1050" dirty="0">
+                        <a:latin typeface="Calibri" charset="0"/>
+                        <a:ea typeface="Calibri" charset="0"/>
+                        <a:cs typeface="Calibri" charset="0"/>
+                      </a:endParaRPr>
+                    </a:p>
+                  </a:txBody>
+                  <a:tcPr marL="91440" marR="91440" marT="45720" marB="45720" anchor="ctr">
+                    <a:lnL w="12700" cap="flat" cmpd="sng" algn="ctr">
+                      <a:solidFill>
+                        <a:srgbClr val="D3DCEA"/>
+                      </a:solidFill>
+                      <a:prstDash val="solid"/>
+                      <a:round/>
+                      <a:headEnd type="none" w="med" len="med"/>
+                      <a:tailEnd type="none" w="med" len="med"/>
+                    </a:lnL>
+                    <a:lnR w="12700" cap="flat" cmpd="sng" algn="ctr">
+                      <a:solidFill>
+                        <a:srgbClr val="D3DCEA"/>
+                      </a:solidFill>
+                      <a:prstDash val="solid"/>
+                      <a:round/>
+                      <a:headEnd type="none" w="med" len="med"/>
+                      <a:tailEnd type="none" w="med" len="med"/>
+                    </a:lnR>
+                    <a:lnT w="12700" cap="flat" cmpd="sng" algn="ctr">
+                      <a:solidFill>
+                        <a:srgbClr val="D3DCEA"/>
+                      </a:solidFill>
+                      <a:prstDash val="solid"/>
+                      <a:round/>
+                      <a:headEnd type="none" w="med" len="med"/>
+                      <a:tailEnd type="none" w="med" len="med"/>
+                    </a:lnT>
+                    <a:lnB w="12700" cap="flat" cmpd="sng" algn="ctr">
+                      <a:solidFill>
+                        <a:srgbClr val="D3DCEA"/>
+                      </a:solidFill>
+                      <a:prstDash val="solid"/>
+                      <a:round/>
+                      <a:headEnd type="none" w="med" len="med"/>
+                      <a:tailEnd type="none" w="med" len="med"/>
+                    </a:lnB>
+                    <a:solidFill>
+                      <a:srgbClr val="FFFFFF"/>
+                    </a:solidFill>
+                  </a:tcPr>
+                </a:tc>
+                <a:tc>
+                  <a:txBody>
+                    <a:bodyPr/>
+                    <a:lstStyle/>
+                    <a:p>
+                      <a:pPr indent="0" marL="0">
+                        <a:buNone/>
+                      </a:pPr>
+                      <a:r>
+                        <a:rPr lang="en-US" sz="1050" dirty="0">
+                          <a:solidFill>
+                            <a:srgbClr val="27374F"/>
+                          </a:solidFill>
+                          <a:latin typeface="Calibri" pitchFamily="34" charset="0"/>
+                          <a:ea typeface="Calibri" pitchFamily="34" charset="-122"/>
+                          <a:cs typeface="Calibri" pitchFamily="34" charset="-120"/>
+                        </a:rPr>
+                        <a:t>41 ms</a:t>
+                      </a:r>
+                      <a:endParaRPr lang="en-US" sz="1050" dirty="0">
+                        <a:latin typeface="Calibri" charset="0"/>
+                        <a:ea typeface="Calibri" charset="0"/>
+                        <a:cs typeface="Calibri" charset="0"/>
+                      </a:endParaRPr>
+                    </a:p>
+                  </a:txBody>
+                  <a:tcPr marL="91440" marR="91440" marT="45720" marB="45720" anchor="ctr">
+                    <a:lnL w="12700" cap="flat" cmpd="sng" algn="ctr">
+                      <a:solidFill>
+                        <a:srgbClr val="D3DCEA"/>
+                      </a:solidFill>
+                      <a:prstDash val="solid"/>
+                      <a:round/>
+                      <a:headEnd type="none" w="med" len="med"/>
+                      <a:tailEnd type="none" w="med" len="med"/>
+                    </a:lnL>
+                    <a:lnR w="12700" cap="flat" cmpd="sng" algn="ctr">
+                      <a:solidFill>
+                        <a:srgbClr val="D3DCEA"/>
+                      </a:solidFill>
+                      <a:prstDash val="solid"/>
+                      <a:round/>
+                      <a:headEnd type="none" w="med" len="med"/>
+                      <a:tailEnd type="none" w="med" len="med"/>
+                    </a:lnR>
+                    <a:lnT w="12700" cap="flat" cmpd="sng" algn="ctr">
+                      <a:solidFill>
+                        <a:srgbClr val="D3DCEA"/>
+                      </a:solidFill>
+                      <a:prstDash val="solid"/>
+                      <a:round/>
+                      <a:headEnd type="none" w="med" len="med"/>
+                      <a:tailEnd type="none" w="med" len="med"/>
+                    </a:lnT>
+                    <a:lnB w="12700" cap="flat" cmpd="sng" algn="ctr">
+                      <a:solidFill>
+                        <a:srgbClr val="D3DCEA"/>
+                      </a:solidFill>
+                      <a:prstDash val="solid"/>
+                      <a:round/>
+                      <a:headEnd type="none" w="med" len="med"/>
+                      <a:tailEnd type="none" w="med" len="med"/>
+                    </a:lnB>
+                    <a:solidFill>
+                      <a:srgbClr val="FFFFFF"/>
+                    </a:solidFill>
+                  </a:tcPr>
+                </a:tc>
+                <a:tc>
+                  <a:txBody>
+                    <a:bodyPr/>
+                    <a:lstStyle/>
+                    <a:p>
+                      <a:pPr indent="0" marL="0">
+                        <a:buNone/>
+                      </a:pPr>
+                      <a:r>
+                        <a:rPr lang="en-US" sz="1050" dirty="0">
+                          <a:solidFill>
+                            <a:srgbClr val="27374F"/>
+                          </a:solidFill>
+                          <a:latin typeface="Calibri" pitchFamily="34" charset="0"/>
+                          <a:ea typeface="Calibri" pitchFamily="34" charset="-122"/>
+                          <a:cs typeface="Calibri" pitchFamily="34" charset="-120"/>
+                        </a:rPr>
+                        <a:t>75 ms</a:t>
+                      </a:r>
+                      <a:endParaRPr lang="en-US" sz="1050" dirty="0">
+                        <a:latin typeface="Calibri" charset="0"/>
+                        <a:ea typeface="Calibri" charset="0"/>
+                        <a:cs typeface="Calibri" charset="0"/>
+                      </a:endParaRPr>
+                    </a:p>
+                  </a:txBody>
+                  <a:tcPr marL="91440" marR="91440" marT="45720" marB="45720" anchor="ctr">
+                    <a:lnL w="12700" cap="flat" cmpd="sng" algn="ctr">
+                      <a:solidFill>
+                        <a:srgbClr val="D3DCEA"/>
+                      </a:solidFill>
+                      <a:prstDash val="solid"/>
+                      <a:round/>
+                      <a:headEnd type="none" w="med" len="med"/>
+                      <a:tailEnd type="none" w="med" len="med"/>
+                    </a:lnL>
+                    <a:lnR w="12700" cap="flat" cmpd="sng" algn="ctr">
+                      <a:solidFill>
+                        <a:srgbClr val="D3DCEA"/>
+                      </a:solidFill>
+                      <a:prstDash val="solid"/>
+                      <a:round/>
+                      <a:headEnd type="none" w="med" len="med"/>
+                      <a:tailEnd type="none" w="med" len="med"/>
+                    </a:lnR>
+                    <a:lnT w="12700" cap="flat" cmpd="sng" algn="ctr">
+                      <a:solidFill>
+                        <a:srgbClr val="D3DCEA"/>
+                      </a:solidFill>
+                      <a:prstDash val="solid"/>
+                      <a:round/>
+                      <a:headEnd type="none" w="med" len="med"/>
+                      <a:tailEnd type="none" w="med" len="med"/>
+                    </a:lnT>
+                    <a:lnB w="12700" cap="flat" cmpd="sng" algn="ctr">
+                      <a:solidFill>
+                        <a:srgbClr val="D3DCEA"/>
+                      </a:solidFill>
+                      <a:prstDash val="solid"/>
+                      <a:round/>
+                      <a:headEnd type="none" w="med" len="med"/>
+                      <a:tailEnd type="none" w="med" len="med"/>
+                    </a:lnB>
+                    <a:solidFill>
+                      <a:srgbClr val="FFFFFF"/>
+                    </a:solidFill>
+                  </a:tcPr>
+                </a:tc>
+                <a:tc>
+                  <a:txBody>
+                    <a:bodyPr/>
+                    <a:lstStyle/>
+                    <a:p>
+                      <a:pPr indent="0" marL="0">
+                        <a:buNone/>
+                      </a:pPr>
+                      <a:r>
+                        <a:rPr lang="en-US" sz="1050" dirty="0">
+                          <a:solidFill>
+                            <a:srgbClr val="27374F"/>
+                          </a:solidFill>
+                          <a:latin typeface="Calibri" pitchFamily="34" charset="0"/>
+                          <a:ea typeface="Calibri" pitchFamily="34" charset="-122"/>
+                          <a:cs typeface="Calibri" pitchFamily="34" charset="-120"/>
+                        </a:rPr>
+                        <a:t>108 ms</a:t>
+                      </a:r>
+                      <a:endParaRPr lang="en-US" sz="1050" dirty="0">
+                        <a:latin typeface="Calibri" charset="0"/>
+                        <a:ea typeface="Calibri" charset="0"/>
+                        <a:cs typeface="Calibri" charset="0"/>
+                      </a:endParaRPr>
+                    </a:p>
+                  </a:txBody>
+                  <a:tcPr marL="91440" marR="91440" marT="45720" marB="45720" anchor="ctr">
+                    <a:lnL w="12700" cap="flat" cmpd="sng" algn="ctr">
+                      <a:solidFill>
+                        <a:srgbClr val="D3DCEA"/>
+                      </a:solidFill>
+                      <a:prstDash val="solid"/>
+                      <a:round/>
+                      <a:headEnd type="none" w="med" len="med"/>
+                      <a:tailEnd type="none" w="med" len="med"/>
+                    </a:lnL>
+                    <a:lnR w="12700" cap="flat" cmpd="sng" algn="ctr">
+                      <a:solidFill>
+                        <a:srgbClr val="D3DCEA"/>
+                      </a:solidFill>
+                      <a:prstDash val="solid"/>
+                      <a:round/>
+                      <a:headEnd type="none" w="med" len="med"/>
+                      <a:tailEnd type="none" w="med" len="med"/>
+                    </a:lnR>
+                    <a:lnT w="12700" cap="flat" cmpd="sng" algn="ctr">
+                      <a:solidFill>
+                        <a:srgbClr val="D3DCEA"/>
+                      </a:solidFill>
+                      <a:prstDash val="solid"/>
+                      <a:round/>
+                      <a:headEnd type="none" w="med" len="med"/>
+                      <a:tailEnd type="none" w="med" len="med"/>
+                    </a:lnT>
+                    <a:lnB w="12700" cap="flat" cmpd="sng" algn="ctr">
+                      <a:solidFill>
+                        <a:srgbClr val="D3DCEA"/>
+                      </a:solidFill>
+                      <a:prstDash val="solid"/>
+                      <a:round/>
+                      <a:headEnd type="none" w="med" len="med"/>
+                      <a:tailEnd type="none" w="med" len="med"/>
+                    </a:lnB>
+                    <a:solidFill>
+                      <a:srgbClr val="FFFFFF"/>
+                    </a:solidFill>
+                  </a:tcPr>
+                </a:tc>
+                <a:tc>
+                  <a:txBody>
+                    <a:bodyPr/>
+                    <a:lstStyle/>
+                    <a:p>
+                      <a:pPr indent="0" marL="0">
+                        <a:buNone/>
+                      </a:pPr>
+                      <a:r>
+                        <a:rPr lang="en-US" sz="1050" dirty="0">
+                          <a:solidFill>
+                            <a:srgbClr val="27374F"/>
+                          </a:solidFill>
+                          <a:latin typeface="Calibri" pitchFamily="34" charset="0"/>
+                          <a:ea typeface="Calibri" pitchFamily="34" charset="-122"/>
+                          <a:cs typeface="Calibri" pitchFamily="34" charset="-120"/>
+                        </a:rPr>
+                        <a:t>15.03</a:t>
                       </a:r>
                       <a:endParaRPr lang="en-US" sz="1050" dirty="0">
                         <a:latin typeface="Calibri" charset="0"/>
@@ -15667,7 +16049,7 @@
                           <a:ea typeface="Calibri" pitchFamily="34" charset="-122"/>
                           <a:cs typeface="Calibri" pitchFamily="34" charset="-120"/>
                         </a:rPr>
-                        <a:t>36 ms</a:t>
+                        <a:t>45 ms</a:t>
                       </a:r>
                       <a:endParaRPr lang="en-US" sz="1050" dirty="0">
                         <a:latin typeface="Calibri" charset="0"/>
@@ -15735,7 +16117,7 @@
                           <a:ea typeface="Calibri" pitchFamily="34" charset="-122"/>
                           <a:cs typeface="Calibri" pitchFamily="34" charset="-120"/>
                         </a:rPr>
-                        <a:t>69 ms</a:t>
+                        <a:t>78 ms</a:t>
                       </a:r>
                       <a:endParaRPr lang="en-US" sz="1050" dirty="0">
                         <a:latin typeface="Calibri" charset="0"/>
@@ -15803,7 +16185,7 @@
                           <a:ea typeface="Calibri" pitchFamily="34" charset="-122"/>
                           <a:cs typeface="Calibri" pitchFamily="34" charset="-120"/>
                         </a:rPr>
-                        <a:t>102 ms</a:t>
+                        <a:t>112 ms</a:t>
                       </a:r>
                       <a:endParaRPr lang="en-US" sz="1050" dirty="0">
                         <a:latin typeface="Calibri" charset="0"/>
@@ -15871,7 +16253,7 @@
                           <a:ea typeface="Calibri" pitchFamily="34" charset="-122"/>
                           <a:cs typeface="Calibri" pitchFamily="34" charset="-120"/>
                         </a:rPr>
-                        <a:t>Output stage only</a:t>
+                        <a:t>15.03</a:t>
                       </a:r>
                       <a:endParaRPr lang="en-US" sz="1050" dirty="0">
                         <a:latin typeface="Calibri" charset="0"/>
@@ -16009,7 +16391,7 @@
                           <a:ea typeface="Calibri" pitchFamily="34" charset="-122"/>
                           <a:cs typeface="Calibri" pitchFamily="34" charset="-120"/>
                         </a:rPr>
-                        <a:t>67 ms</a:t>
+                        <a:t>50 ms</a:t>
                       </a:r>
                       <a:endParaRPr lang="en-US" sz="1050" dirty="0">
                         <a:latin typeface="Calibri" charset="0"/>
@@ -16077,623 +16459,7 @@
                           <a:ea typeface="Calibri" pitchFamily="34" charset="-122"/>
                           <a:cs typeface="Calibri" pitchFamily="34" charset="-120"/>
                         </a:rPr>
-                        <a:t>100 ms</a:t>
-                      </a:r>
-                      <a:endParaRPr lang="en-US" sz="1050" dirty="0">
-                        <a:latin typeface="Calibri" charset="0"/>
-                        <a:ea typeface="Calibri" charset="0"/>
-                        <a:cs typeface="Calibri" charset="0"/>
-                      </a:endParaRPr>
-                    </a:p>
-                  </a:txBody>
-                  <a:tcPr marL="91440" marR="91440" marT="45720" marB="45720" anchor="ctr">
-                    <a:lnL w="12700" cap="flat" cmpd="sng" algn="ctr">
-                      <a:solidFill>
-                        <a:srgbClr val="D3DCEA"/>
-                      </a:solidFill>
-                      <a:prstDash val="solid"/>
-                      <a:round/>
-                      <a:headEnd type="none" w="med" len="med"/>
-                      <a:tailEnd type="none" w="med" len="med"/>
-                    </a:lnL>
-                    <a:lnR w="12700" cap="flat" cmpd="sng" algn="ctr">
-                      <a:solidFill>
-                        <a:srgbClr val="D3DCEA"/>
-                      </a:solidFill>
-                      <a:prstDash val="solid"/>
-                      <a:round/>
-                      <a:headEnd type="none" w="med" len="med"/>
-                      <a:tailEnd type="none" w="med" len="med"/>
-                    </a:lnR>
-                    <a:lnT w="12700" cap="flat" cmpd="sng" algn="ctr">
-                      <a:solidFill>
-                        <a:srgbClr val="D3DCEA"/>
-                      </a:solidFill>
-                      <a:prstDash val="solid"/>
-                      <a:round/>
-                      <a:headEnd type="none" w="med" len="med"/>
-                      <a:tailEnd type="none" w="med" len="med"/>
-                    </a:lnT>
-                    <a:lnB w="12700" cap="flat" cmpd="sng" algn="ctr">
-                      <a:solidFill>
-                        <a:srgbClr val="D3DCEA"/>
-                      </a:solidFill>
-                      <a:prstDash val="solid"/>
-                      <a:round/>
-                      <a:headEnd type="none" w="med" len="med"/>
-                      <a:tailEnd type="none" w="med" len="med"/>
-                    </a:lnB>
-                    <a:solidFill>
-                      <a:srgbClr val="FFFFFF"/>
-                    </a:solidFill>
-                  </a:tcPr>
-                </a:tc>
-                <a:tc>
-                  <a:txBody>
-                    <a:bodyPr/>
-                    <a:lstStyle/>
-                    <a:p>
-                      <a:pPr indent="0" marL="0">
-                        <a:buNone/>
-                      </a:pPr>
-                      <a:r>
-                        <a:rPr lang="en-US" sz="1050" dirty="0">
-                          <a:solidFill>
-                            <a:srgbClr val="27374F"/>
-                          </a:solidFill>
-                          <a:latin typeface="Calibri" pitchFamily="34" charset="0"/>
-                          <a:ea typeface="Calibri" pitchFamily="34" charset="-122"/>
-                          <a:cs typeface="Calibri" pitchFamily="34" charset="-120"/>
-                        </a:rPr>
-                        <a:t>133 ms</a:t>
-                      </a:r>
-                      <a:endParaRPr lang="en-US" sz="1050" dirty="0">
-                        <a:latin typeface="Calibri" charset="0"/>
-                        <a:ea typeface="Calibri" charset="0"/>
-                        <a:cs typeface="Calibri" charset="0"/>
-                      </a:endParaRPr>
-                    </a:p>
-                  </a:txBody>
-                  <a:tcPr marL="91440" marR="91440" marT="45720" marB="45720" anchor="ctr">
-                    <a:lnL w="12700" cap="flat" cmpd="sng" algn="ctr">
-                      <a:solidFill>
-                        <a:srgbClr val="D3DCEA"/>
-                      </a:solidFill>
-                      <a:prstDash val="solid"/>
-                      <a:round/>
-                      <a:headEnd type="none" w="med" len="med"/>
-                      <a:tailEnd type="none" w="med" len="med"/>
-                    </a:lnL>
-                    <a:lnR w="12700" cap="flat" cmpd="sng" algn="ctr">
-                      <a:solidFill>
-                        <a:srgbClr val="D3DCEA"/>
-                      </a:solidFill>
-                      <a:prstDash val="solid"/>
-                      <a:round/>
-                      <a:headEnd type="none" w="med" len="med"/>
-                      <a:tailEnd type="none" w="med" len="med"/>
-                    </a:lnR>
-                    <a:lnT w="12700" cap="flat" cmpd="sng" algn="ctr">
-                      <a:solidFill>
-                        <a:srgbClr val="D3DCEA"/>
-                      </a:solidFill>
-                      <a:prstDash val="solid"/>
-                      <a:round/>
-                      <a:headEnd type="none" w="med" len="med"/>
-                      <a:tailEnd type="none" w="med" len="med"/>
-                    </a:lnT>
-                    <a:lnB w="12700" cap="flat" cmpd="sng" algn="ctr">
-                      <a:solidFill>
-                        <a:srgbClr val="D3DCEA"/>
-                      </a:solidFill>
-                      <a:prstDash val="solid"/>
-                      <a:round/>
-                      <a:headEnd type="none" w="med" len="med"/>
-                      <a:tailEnd type="none" w="med" len="med"/>
-                    </a:lnB>
-                    <a:solidFill>
-                      <a:srgbClr val="FFFFFF"/>
-                    </a:solidFill>
-                  </a:tcPr>
-                </a:tc>
-                <a:tc>
-                  <a:txBody>
-                    <a:bodyPr/>
-                    <a:lstStyle/>
-                    <a:p>
-                      <a:pPr indent="0" marL="0">
-                        <a:buNone/>
-                      </a:pPr>
-                      <a:r>
-                        <a:rPr lang="en-US" sz="1050" dirty="0">
-                          <a:solidFill>
-                            <a:srgbClr val="27374F"/>
-                          </a:solidFill>
-                          <a:latin typeface="Calibri" pitchFamily="34" charset="0"/>
-                          <a:ea typeface="Calibri" pitchFamily="34" charset="-122"/>
-                          <a:cs typeface="Calibri" pitchFamily="34" charset="-120"/>
-                        </a:rPr>
-                        <a:t>Store and forward</a:t>
-                      </a:r>
-                      <a:endParaRPr lang="en-US" sz="1050" dirty="0">
-                        <a:latin typeface="Calibri" charset="0"/>
-                        <a:ea typeface="Calibri" charset="0"/>
-                        <a:cs typeface="Calibri" charset="0"/>
-                      </a:endParaRPr>
-                    </a:p>
-                  </a:txBody>
-                  <a:tcPr marL="91440" marR="91440" marT="45720" marB="45720" anchor="ctr">
-                    <a:lnL w="12700" cap="flat" cmpd="sng" algn="ctr">
-                      <a:solidFill>
-                        <a:srgbClr val="D3DCEA"/>
-                      </a:solidFill>
-                      <a:prstDash val="solid"/>
-                      <a:round/>
-                      <a:headEnd type="none" w="med" len="med"/>
-                      <a:tailEnd type="none" w="med" len="med"/>
-                    </a:lnL>
-                    <a:lnR w="12700" cap="flat" cmpd="sng" algn="ctr">
-                      <a:solidFill>
-                        <a:srgbClr val="D3DCEA"/>
-                      </a:solidFill>
-                      <a:prstDash val="solid"/>
-                      <a:round/>
-                      <a:headEnd type="none" w="med" len="med"/>
-                      <a:tailEnd type="none" w="med" len="med"/>
-                    </a:lnR>
-                    <a:lnT w="12700" cap="flat" cmpd="sng" algn="ctr">
-                      <a:solidFill>
-                        <a:srgbClr val="D3DCEA"/>
-                      </a:solidFill>
-                      <a:prstDash val="solid"/>
-                      <a:round/>
-                      <a:headEnd type="none" w="med" len="med"/>
-                      <a:tailEnd type="none" w="med" len="med"/>
-                    </a:lnT>
-                    <a:lnB w="12700" cap="flat" cmpd="sng" algn="ctr">
-                      <a:solidFill>
-                        <a:srgbClr val="D3DCEA"/>
-                      </a:solidFill>
-                      <a:prstDash val="solid"/>
-                      <a:round/>
-                      <a:headEnd type="none" w="med" len="med"/>
-                      <a:tailEnd type="none" w="med" len="med"/>
-                    </a:lnB>
-                    <a:solidFill>
-                      <a:srgbClr val="FFFFFF"/>
-                    </a:solidFill>
-                  </a:tcPr>
-                </a:tc>
-              </a:tr>
-              <a:tr h="384048">
-                <a:tc>
-                  <a:txBody>
-                    <a:bodyPr/>
-                    <a:lstStyle/>
-                    <a:p>
-                      <a:pPr indent="0" marL="0">
-                        <a:buNone/>
-                      </a:pPr>
-                      <a:r>
-                        <a:rPr lang="en-US" sz="1050" dirty="0">
-                          <a:solidFill>
-                            <a:srgbClr val="27374F"/>
-                          </a:solidFill>
-                          <a:latin typeface="Calibri" pitchFamily="34" charset="0"/>
-                          <a:ea typeface="Calibri" pitchFamily="34" charset="-122"/>
-                          <a:cs typeface="Calibri" pitchFamily="34" charset="-120"/>
-                        </a:rPr>
-                        <a:t>EO single</a:t>
-                      </a:r>
-                      <a:endParaRPr lang="en-US" sz="1050" dirty="0">
-                        <a:latin typeface="Calibri" charset="0"/>
-                        <a:ea typeface="Calibri" charset="0"/>
-                        <a:cs typeface="Calibri" charset="0"/>
-                      </a:endParaRPr>
-                    </a:p>
-                  </a:txBody>
-                  <a:tcPr marL="91440" marR="91440" marT="45720" marB="45720" anchor="ctr">
-                    <a:lnL w="12700" cap="flat" cmpd="sng" algn="ctr">
-                      <a:solidFill>
-                        <a:srgbClr val="D3DCEA"/>
-                      </a:solidFill>
-                      <a:prstDash val="solid"/>
-                      <a:round/>
-                      <a:headEnd type="none" w="med" len="med"/>
-                      <a:tailEnd type="none" w="med" len="med"/>
-                    </a:lnL>
-                    <a:lnR w="12700" cap="flat" cmpd="sng" algn="ctr">
-                      <a:solidFill>
-                        <a:srgbClr val="D3DCEA"/>
-                      </a:solidFill>
-                      <a:prstDash val="solid"/>
-                      <a:round/>
-                      <a:headEnd type="none" w="med" len="med"/>
-                      <a:tailEnd type="none" w="med" len="med"/>
-                    </a:lnR>
-                    <a:lnT w="12700" cap="flat" cmpd="sng" algn="ctr">
-                      <a:solidFill>
-                        <a:srgbClr val="D3DCEA"/>
-                      </a:solidFill>
-                      <a:prstDash val="solid"/>
-                      <a:round/>
-                      <a:headEnd type="none" w="med" len="med"/>
-                      <a:tailEnd type="none" w="med" len="med"/>
-                    </a:lnT>
-                    <a:lnB w="12700" cap="flat" cmpd="sng" algn="ctr">
-                      <a:solidFill>
-                        <a:srgbClr val="D3DCEA"/>
-                      </a:solidFill>
-                      <a:prstDash val="solid"/>
-                      <a:round/>
-                      <a:headEnd type="none" w="med" len="med"/>
-                      <a:tailEnd type="none" w="med" len="med"/>
-                    </a:lnB>
-                    <a:solidFill>
-                      <a:srgbClr val="FFFFFF"/>
-                    </a:solidFill>
-                  </a:tcPr>
-                </a:tc>
-                <a:tc>
-                  <a:txBody>
-                    <a:bodyPr/>
-                    <a:lstStyle/>
-                    <a:p>
-                      <a:pPr indent="0" marL="0">
-                        <a:buNone/>
-                      </a:pPr>
-                      <a:r>
-                        <a:rPr lang="en-US" sz="1050" dirty="0">
-                          <a:solidFill>
-                            <a:srgbClr val="27374F"/>
-                          </a:solidFill>
-                          <a:latin typeface="Calibri" pitchFamily="34" charset="0"/>
-                          <a:ea typeface="Calibri" pitchFamily="34" charset="-122"/>
-                          <a:cs typeface="Calibri" pitchFamily="34" charset="-120"/>
-                        </a:rPr>
-                        <a:t>67 ms</a:t>
-                      </a:r>
-                      <a:endParaRPr lang="en-US" sz="1050" dirty="0">
-                        <a:latin typeface="Calibri" charset="0"/>
-                        <a:ea typeface="Calibri" charset="0"/>
-                        <a:cs typeface="Calibri" charset="0"/>
-                      </a:endParaRPr>
-                    </a:p>
-                  </a:txBody>
-                  <a:tcPr marL="91440" marR="91440" marT="45720" marB="45720" anchor="ctr">
-                    <a:lnL w="12700" cap="flat" cmpd="sng" algn="ctr">
-                      <a:solidFill>
-                        <a:srgbClr val="D3DCEA"/>
-                      </a:solidFill>
-                      <a:prstDash val="solid"/>
-                      <a:round/>
-                      <a:headEnd type="none" w="med" len="med"/>
-                      <a:tailEnd type="none" w="med" len="med"/>
-                    </a:lnL>
-                    <a:lnR w="12700" cap="flat" cmpd="sng" algn="ctr">
-                      <a:solidFill>
-                        <a:srgbClr val="D3DCEA"/>
-                      </a:solidFill>
-                      <a:prstDash val="solid"/>
-                      <a:round/>
-                      <a:headEnd type="none" w="med" len="med"/>
-                      <a:tailEnd type="none" w="med" len="med"/>
-                    </a:lnR>
-                    <a:lnT w="12700" cap="flat" cmpd="sng" algn="ctr">
-                      <a:solidFill>
-                        <a:srgbClr val="D3DCEA"/>
-                      </a:solidFill>
-                      <a:prstDash val="solid"/>
-                      <a:round/>
-                      <a:headEnd type="none" w="med" len="med"/>
-                      <a:tailEnd type="none" w="med" len="med"/>
-                    </a:lnT>
-                    <a:lnB w="12700" cap="flat" cmpd="sng" algn="ctr">
-                      <a:solidFill>
-                        <a:srgbClr val="D3DCEA"/>
-                      </a:solidFill>
-                      <a:prstDash val="solid"/>
-                      <a:round/>
-                      <a:headEnd type="none" w="med" len="med"/>
-                      <a:tailEnd type="none" w="med" len="med"/>
-                    </a:lnB>
-                    <a:solidFill>
-                      <a:srgbClr val="FFFFFF"/>
-                    </a:solidFill>
-                  </a:tcPr>
-                </a:tc>
-                <a:tc>
-                  <a:txBody>
-                    <a:bodyPr/>
-                    <a:lstStyle/>
-                    <a:p>
-                      <a:pPr indent="0" marL="0">
-                        <a:buNone/>
-                      </a:pPr>
-                      <a:r>
-                        <a:rPr lang="en-US" sz="1050" dirty="0">
-                          <a:solidFill>
-                            <a:srgbClr val="27374F"/>
-                          </a:solidFill>
-                          <a:latin typeface="Calibri" pitchFamily="34" charset="0"/>
-                          <a:ea typeface="Calibri" pitchFamily="34" charset="-122"/>
-                          <a:cs typeface="Calibri" pitchFamily="34" charset="-120"/>
-                        </a:rPr>
-                        <a:t>100 ms</a:t>
-                      </a:r>
-                      <a:endParaRPr lang="en-US" sz="1050" dirty="0">
-                        <a:latin typeface="Calibri" charset="0"/>
-                        <a:ea typeface="Calibri" charset="0"/>
-                        <a:cs typeface="Calibri" charset="0"/>
-                      </a:endParaRPr>
-                    </a:p>
-                  </a:txBody>
-                  <a:tcPr marL="91440" marR="91440" marT="45720" marB="45720" anchor="ctr">
-                    <a:lnL w="12700" cap="flat" cmpd="sng" algn="ctr">
-                      <a:solidFill>
-                        <a:srgbClr val="D3DCEA"/>
-                      </a:solidFill>
-                      <a:prstDash val="solid"/>
-                      <a:round/>
-                      <a:headEnd type="none" w="med" len="med"/>
-                      <a:tailEnd type="none" w="med" len="med"/>
-                    </a:lnL>
-                    <a:lnR w="12700" cap="flat" cmpd="sng" algn="ctr">
-                      <a:solidFill>
-                        <a:srgbClr val="D3DCEA"/>
-                      </a:solidFill>
-                      <a:prstDash val="solid"/>
-                      <a:round/>
-                      <a:headEnd type="none" w="med" len="med"/>
-                      <a:tailEnd type="none" w="med" len="med"/>
-                    </a:lnR>
-                    <a:lnT w="12700" cap="flat" cmpd="sng" algn="ctr">
-                      <a:solidFill>
-                        <a:srgbClr val="D3DCEA"/>
-                      </a:solidFill>
-                      <a:prstDash val="solid"/>
-                      <a:round/>
-                      <a:headEnd type="none" w="med" len="med"/>
-                      <a:tailEnd type="none" w="med" len="med"/>
-                    </a:lnT>
-                    <a:lnB w="12700" cap="flat" cmpd="sng" algn="ctr">
-                      <a:solidFill>
-                        <a:srgbClr val="D3DCEA"/>
-                      </a:solidFill>
-                      <a:prstDash val="solid"/>
-                      <a:round/>
-                      <a:headEnd type="none" w="med" len="med"/>
-                      <a:tailEnd type="none" w="med" len="med"/>
-                    </a:lnB>
-                    <a:solidFill>
-                      <a:srgbClr val="FFFFFF"/>
-                    </a:solidFill>
-                  </a:tcPr>
-                </a:tc>
-                <a:tc>
-                  <a:txBody>
-                    <a:bodyPr/>
-                    <a:lstStyle/>
-                    <a:p>
-                      <a:pPr indent="0" marL="0">
-                        <a:buNone/>
-                      </a:pPr>
-                      <a:r>
-                        <a:rPr lang="en-US" sz="1050" dirty="0">
-                          <a:solidFill>
-                            <a:srgbClr val="27374F"/>
-                          </a:solidFill>
-                          <a:latin typeface="Calibri" pitchFamily="34" charset="0"/>
-                          <a:ea typeface="Calibri" pitchFamily="34" charset="-122"/>
-                          <a:cs typeface="Calibri" pitchFamily="34" charset="-120"/>
-                        </a:rPr>
-                        <a:t>133 ms</a:t>
-                      </a:r>
-                      <a:endParaRPr lang="en-US" sz="1050" dirty="0">
-                        <a:latin typeface="Calibri" charset="0"/>
-                        <a:ea typeface="Calibri" charset="0"/>
-                        <a:cs typeface="Calibri" charset="0"/>
-                      </a:endParaRPr>
-                    </a:p>
-                  </a:txBody>
-                  <a:tcPr marL="91440" marR="91440" marT="45720" marB="45720" anchor="ctr">
-                    <a:lnL w="12700" cap="flat" cmpd="sng" algn="ctr">
-                      <a:solidFill>
-                        <a:srgbClr val="D3DCEA"/>
-                      </a:solidFill>
-                      <a:prstDash val="solid"/>
-                      <a:round/>
-                      <a:headEnd type="none" w="med" len="med"/>
-                      <a:tailEnd type="none" w="med" len="med"/>
-                    </a:lnL>
-                    <a:lnR w="12700" cap="flat" cmpd="sng" algn="ctr">
-                      <a:solidFill>
-                        <a:srgbClr val="D3DCEA"/>
-                      </a:solidFill>
-                      <a:prstDash val="solid"/>
-                      <a:round/>
-                      <a:headEnd type="none" w="med" len="med"/>
-                      <a:tailEnd type="none" w="med" len="med"/>
-                    </a:lnR>
-                    <a:lnT w="12700" cap="flat" cmpd="sng" algn="ctr">
-                      <a:solidFill>
-                        <a:srgbClr val="D3DCEA"/>
-                      </a:solidFill>
-                      <a:prstDash val="solid"/>
-                      <a:round/>
-                      <a:headEnd type="none" w="med" len="med"/>
-                      <a:tailEnd type="none" w="med" len="med"/>
-                    </a:lnT>
-                    <a:lnB w="12700" cap="flat" cmpd="sng" algn="ctr">
-                      <a:solidFill>
-                        <a:srgbClr val="D3DCEA"/>
-                      </a:solidFill>
-                      <a:prstDash val="solid"/>
-                      <a:round/>
-                      <a:headEnd type="none" w="med" len="med"/>
-                      <a:tailEnd type="none" w="med" len="med"/>
-                    </a:lnB>
-                    <a:solidFill>
-                      <a:srgbClr val="FFFFFF"/>
-                    </a:solidFill>
-                  </a:tcPr>
-                </a:tc>
-                <a:tc>
-                  <a:txBody>
-                    <a:bodyPr/>
-                    <a:lstStyle/>
-                    <a:p>
-                      <a:pPr indent="0" marL="0">
-                        <a:buNone/>
-                      </a:pPr>
-                      <a:r>
-                        <a:rPr lang="en-US" sz="1050" dirty="0">
-                          <a:solidFill>
-                            <a:srgbClr val="27374F"/>
-                          </a:solidFill>
-                          <a:latin typeface="Calibri" pitchFamily="34" charset="0"/>
-                          <a:ea typeface="Calibri" pitchFamily="34" charset="-122"/>
-                          <a:cs typeface="Calibri" pitchFamily="34" charset="-120"/>
-                        </a:rPr>
-                        <a:t>Store and forward</a:t>
-                      </a:r>
-                      <a:endParaRPr lang="en-US" sz="1050" dirty="0">
-                        <a:latin typeface="Calibri" charset="0"/>
-                        <a:ea typeface="Calibri" charset="0"/>
-                        <a:cs typeface="Calibri" charset="0"/>
-                      </a:endParaRPr>
-                    </a:p>
-                  </a:txBody>
-                  <a:tcPr marL="91440" marR="91440" marT="45720" marB="45720" anchor="ctr">
-                    <a:lnL w="12700" cap="flat" cmpd="sng" algn="ctr">
-                      <a:solidFill>
-                        <a:srgbClr val="D3DCEA"/>
-                      </a:solidFill>
-                      <a:prstDash val="solid"/>
-                      <a:round/>
-                      <a:headEnd type="none" w="med" len="med"/>
-                      <a:tailEnd type="none" w="med" len="med"/>
-                    </a:lnL>
-                    <a:lnR w="12700" cap="flat" cmpd="sng" algn="ctr">
-                      <a:solidFill>
-                        <a:srgbClr val="D3DCEA"/>
-                      </a:solidFill>
-                      <a:prstDash val="solid"/>
-                      <a:round/>
-                      <a:headEnd type="none" w="med" len="med"/>
-                      <a:tailEnd type="none" w="med" len="med"/>
-                    </a:lnR>
-                    <a:lnT w="12700" cap="flat" cmpd="sng" algn="ctr">
-                      <a:solidFill>
-                        <a:srgbClr val="D3DCEA"/>
-                      </a:solidFill>
-                      <a:prstDash val="solid"/>
-                      <a:round/>
-                      <a:headEnd type="none" w="med" len="med"/>
-                      <a:tailEnd type="none" w="med" len="med"/>
-                    </a:lnT>
-                    <a:lnB w="12700" cap="flat" cmpd="sng" algn="ctr">
-                      <a:solidFill>
-                        <a:srgbClr val="D3DCEA"/>
-                      </a:solidFill>
-                      <a:prstDash val="solid"/>
-                      <a:round/>
-                      <a:headEnd type="none" w="med" len="med"/>
-                      <a:tailEnd type="none" w="med" len="med"/>
-                    </a:lnB>
-                    <a:solidFill>
-                      <a:srgbClr val="FFFFFF"/>
-                    </a:solidFill>
-                  </a:tcPr>
-                </a:tc>
-              </a:tr>
-              <a:tr h="384048">
-                <a:tc>
-                  <a:txBody>
-                    <a:bodyPr/>
-                    <a:lstStyle/>
-                    <a:p>
-                      <a:pPr indent="0" marL="0">
-                        <a:buNone/>
-                      </a:pPr>
-                      <a:r>
-                        <a:rPr lang="en-US" sz="1050" dirty="0">
-                          <a:solidFill>
-                            <a:srgbClr val="27374F"/>
-                          </a:solidFill>
-                          <a:latin typeface="Calibri" pitchFamily="34" charset="0"/>
-                          <a:ea typeface="Calibri" pitchFamily="34" charset="-122"/>
-                          <a:cs typeface="Calibri" pitchFamily="34" charset="-120"/>
-                        </a:rPr>
-                        <a:t>EO panorama</a:t>
-                      </a:r>
-                      <a:endParaRPr lang="en-US" sz="1050" dirty="0">
-                        <a:latin typeface="Calibri" charset="0"/>
-                        <a:ea typeface="Calibri" charset="0"/>
-                        <a:cs typeface="Calibri" charset="0"/>
-                      </a:endParaRPr>
-                    </a:p>
-                  </a:txBody>
-                  <a:tcPr marL="91440" marR="91440" marT="45720" marB="45720" anchor="ctr">
-                    <a:lnL w="12700" cap="flat" cmpd="sng" algn="ctr">
-                      <a:solidFill>
-                        <a:srgbClr val="D3DCEA"/>
-                      </a:solidFill>
-                      <a:prstDash val="solid"/>
-                      <a:round/>
-                      <a:headEnd type="none" w="med" len="med"/>
-                      <a:tailEnd type="none" w="med" len="med"/>
-                    </a:lnL>
-                    <a:lnR w="12700" cap="flat" cmpd="sng" algn="ctr">
-                      <a:solidFill>
-                        <a:srgbClr val="D3DCEA"/>
-                      </a:solidFill>
-                      <a:prstDash val="solid"/>
-                      <a:round/>
-                      <a:headEnd type="none" w="med" len="med"/>
-                      <a:tailEnd type="none" w="med" len="med"/>
-                    </a:lnR>
-                    <a:lnT w="12700" cap="flat" cmpd="sng" algn="ctr">
-                      <a:solidFill>
-                        <a:srgbClr val="D3DCEA"/>
-                      </a:solidFill>
-                      <a:prstDash val="solid"/>
-                      <a:round/>
-                      <a:headEnd type="none" w="med" len="med"/>
-                      <a:tailEnd type="none" w="med" len="med"/>
-                    </a:lnT>
-                    <a:lnB w="12700" cap="flat" cmpd="sng" algn="ctr">
-                      <a:solidFill>
-                        <a:srgbClr val="D3DCEA"/>
-                      </a:solidFill>
-                      <a:prstDash val="solid"/>
-                      <a:round/>
-                      <a:headEnd type="none" w="med" len="med"/>
-                      <a:tailEnd type="none" w="med" len="med"/>
-                    </a:lnB>
-                    <a:solidFill>
-                      <a:srgbClr val="FFFFFF"/>
-                    </a:solidFill>
-                  </a:tcPr>
-                </a:tc>
-                <a:tc>
-                  <a:txBody>
-                    <a:bodyPr/>
-                    <a:lstStyle/>
-                    <a:p>
-                      <a:pPr indent="0" marL="0">
-                        <a:buNone/>
-                      </a:pPr>
-                      <a:r>
-                        <a:rPr lang="en-US" sz="1050" dirty="0">
-                          <a:solidFill>
-                            <a:srgbClr val="27374F"/>
-                          </a:solidFill>
-                          <a:latin typeface="Calibri" pitchFamily="34" charset="0"/>
-                          <a:ea typeface="Calibri" pitchFamily="34" charset="-122"/>
-                          <a:cs typeface="Calibri" pitchFamily="34" charset="-120"/>
-                        </a:rPr>
-                        <a:t>67 ms</a:t>
+                        <a:t>84 ms</a:t>
                       </a:r>
                       <a:endParaRPr lang="en-US" sz="1050" dirty="0">
                         <a:latin typeface="Calibri" charset="0"/>
@@ -16829,75 +16595,7 @@
                           <a:ea typeface="Calibri" pitchFamily="34" charset="-122"/>
                           <a:cs typeface="Calibri" pitchFamily="34" charset="-120"/>
                         </a:rPr>
-                        <a:t>167 ms</a:t>
-                      </a:r>
-                      <a:endParaRPr lang="en-US" sz="1050" dirty="0">
-                        <a:latin typeface="Calibri" charset="0"/>
-                        <a:ea typeface="Calibri" charset="0"/>
-                        <a:cs typeface="Calibri" charset="0"/>
-                      </a:endParaRPr>
-                    </a:p>
-                  </a:txBody>
-                  <a:tcPr marL="91440" marR="91440" marT="45720" marB="45720" anchor="ctr">
-                    <a:lnL w="12700" cap="flat" cmpd="sng" algn="ctr">
-                      <a:solidFill>
-                        <a:srgbClr val="D3DCEA"/>
-                      </a:solidFill>
-                      <a:prstDash val="solid"/>
-                      <a:round/>
-                      <a:headEnd type="none" w="med" len="med"/>
-                      <a:tailEnd type="none" w="med" len="med"/>
-                    </a:lnL>
-                    <a:lnR w="12700" cap="flat" cmpd="sng" algn="ctr">
-                      <a:solidFill>
-                        <a:srgbClr val="D3DCEA"/>
-                      </a:solidFill>
-                      <a:prstDash val="solid"/>
-                      <a:round/>
-                      <a:headEnd type="none" w="med" len="med"/>
-                      <a:tailEnd type="none" w="med" len="med"/>
-                    </a:lnR>
-                    <a:lnT w="12700" cap="flat" cmpd="sng" algn="ctr">
-                      <a:solidFill>
-                        <a:srgbClr val="D3DCEA"/>
-                      </a:solidFill>
-                      <a:prstDash val="solid"/>
-                      <a:round/>
-                      <a:headEnd type="none" w="med" len="med"/>
-                      <a:tailEnd type="none" w="med" len="med"/>
-                    </a:lnT>
-                    <a:lnB w="12700" cap="flat" cmpd="sng" algn="ctr">
-                      <a:solidFill>
-                        <a:srgbClr val="D3DCEA"/>
-                      </a:solidFill>
-                      <a:prstDash val="solid"/>
-                      <a:round/>
-                      <a:headEnd type="none" w="med" len="med"/>
-                      <a:tailEnd type="none" w="med" len="med"/>
-                    </a:lnB>
-                    <a:solidFill>
-                      <a:srgbClr val="FFFFFF"/>
-                    </a:solidFill>
-                  </a:tcPr>
-                </a:tc>
-                <a:tc>
-                  <a:txBody>
-                    <a:bodyPr/>
-                    <a:lstStyle/>
-                    <a:p>
-                      <a:pPr indent="0" marL="0">
-                        <a:buNone/>
-                      </a:pPr>
-                      <a:r>
-                        <a:rPr lang="en-US" sz="1050" dirty="0">
-                          <a:solidFill>
-                            <a:srgbClr val="27374F"/>
-                          </a:solidFill>
-                          <a:latin typeface="Calibri" pitchFamily="34" charset="0"/>
-                          <a:ea typeface="Calibri" pitchFamily="34" charset="-122"/>
-                          <a:cs typeface="Calibri" pitchFamily="34" charset="-120"/>
-                        </a:rPr>
-                        <a:t>Camera alignment</a:t>
+                        <a:t>30.01</a:t>
                       </a:r>
                       <a:endParaRPr lang="en-US" sz="1050" dirty="0">
                         <a:latin typeface="Calibri" charset="0"/>
@@ -17013,7 +16711,7 @@
                 <a:ea typeface="Calibri" pitchFamily="34" charset="-122"/>
                 <a:cs typeface="Calibri" pitchFamily="34" charset="-120"/>
               </a:rPr>
-              <a:t>The spread between best and worst is one output frame in each direction. </a:t>
+              <a:t>The spread is one output frame in each direction. </a:t>
             </a:r>
             <a:pPr indent="0" marL="0">
               <a:buNone/>
@@ -17027,7 +16725,7 @@
                 <a:ea typeface="Calibri" pitchFamily="34" charset="-122"/>
                 <a:cs typeface="Calibri" pitchFamily="34" charset="-120"/>
               </a:rPr>
-              <a:t>It comes from where a frame happens to land relative to the output frame boundary, which is not controlled and varies frame to frame.</a:t>
+              <a:t>A row's age when its frame completes, and its position in the output raster, each range from zero to a full frame and are not controlled. Only the middle term is fixed by the design, and that is the part measured.</a:t>
             </a:r>
             <a:endParaRPr lang="en-US" sz="1250" dirty="0"/>
           </a:p>
@@ -17176,7 +16874,7 @@
                 <a:ea typeface="Calibri" pitchFamily="34" charset="-122"/>
                 <a:cs typeface="Calibri" pitchFamily="34" charset="-120"/>
               </a:rPr>
-              <a:t>Latency is how old the picture is. Refresh is how often it is replaced. They are separate, and on the EO paths they differ.</a:t>
+              <a:t>Latency is how old the picture is. Refresh is how often it is replaced. They are separate, and in the panorama modes they differ.</a:t>
             </a:r>
             <a:endParaRPr lang="en-US" sz="1350" dirty="0"/>
           </a:p>
@@ -17339,7 +17037,7 @@
               <a:buNone/>
             </a:pPr>
             <a:r>
-              <a:rPr lang="en-US" sz="2100" b="1" dirty="0">
+              <a:rPr lang="en-US" sz="3400" b="1" dirty="0">
                 <a:solidFill>
                   <a:srgbClr val="C2A33B"/>
                 </a:solidFill>
@@ -17347,9 +17045,9 @@
                 <a:ea typeface="Cambria" pitchFamily="34" charset="-122"/>
                 <a:cs typeface="Cambria" pitchFamily="34" charset="-120"/>
               </a:rPr>
-              <a:t>15.1 Hz</a:t>
-            </a:r>
-            <a:endParaRPr lang="en-US" sz="2100" dirty="0"/>
+              <a:t>15.0</a:t>
+            </a:r>
+            <a:endParaRPr lang="en-US" sz="3400" dirty="0"/>
           </a:p>
         </p:txBody>
       </p:sp>
@@ -17386,7 +17084,7 @@
                 <a:ea typeface="Calibri" pitchFamily="34" charset="-122"/>
                 <a:cs typeface="Calibri" pitchFamily="34" charset="-120"/>
               </a:rPr>
-              <a:t>measured new frames on the EO paths</a:t>
+              <a:t>new frames/s, both panorama modes</a:t>
             </a:r>
             <a:endParaRPr lang="en-US" sz="1050" dirty="0"/>
           </a:p>
@@ -17446,13 +17144,13 @@
             <a:r>
               <a:rPr lang="en-US" sz="3400" b="1" dirty="0">
                 <a:solidFill>
-                  <a:srgbClr val="C2A33B"/>
+                  <a:srgbClr val="02A37A"/>
                 </a:solidFill>
                 <a:latin typeface="Cambria" pitchFamily="34" charset="0"/>
                 <a:ea typeface="Cambria" pitchFamily="34" charset="-122"/>
                 <a:cs typeface="Cambria" pitchFamily="34" charset="-120"/>
               </a:rPr>
-              <a:t>2x</a:t>
+              <a:t>30.0</a:t>
             </a:r>
             <a:endParaRPr lang="en-US" sz="3400" dirty="0"/>
           </a:p>
@@ -17491,7 +17189,7 @@
                 <a:ea typeface="Calibri" pitchFamily="34" charset="-122"/>
                 <a:cs typeface="Calibri" pitchFamily="34" charset="-120"/>
               </a:rPr>
-              <a:t>each frame is presented twice</a:t>
+              <a:t>new frames/s, both single modes</a:t>
             </a:r>
             <a:endParaRPr lang="en-US" sz="1050" dirty="0"/>
           </a:p>
@@ -17596,7 +17294,7 @@
                 <a:ea typeface="Calibri" pitchFamily="34" charset="-122"/>
                 <a:cs typeface="Calibri" pitchFamily="34" charset="-120"/>
               </a:rPr>
-              <a:t>average extra staleness this adds</a:t>
+              <a:t>extra staleness in the panorama modes</a:t>
             </a:r>
             <a:endParaRPr lang="en-US" sz="1050" dirty="0"/>
           </a:p>
@@ -17674,7 +17372,7 @@
                 <a:ea typeface="Calibri" pitchFamily="34" charset="-122"/>
                 <a:cs typeface="Calibri" pitchFamily="34" charset="-120"/>
               </a:rPr>
-              <a:t>The render pass currently occupies almost a whole output frame period. A render that begins on one frame boundary therefore finishes during the next one, and can only be published on the boundary after that - so a new picture appears every second output frame.</a:t>
+              <a:t>The single-camera modes keep up with the raster: 29.75 and 30.01 new frames per second, measured by counting published frames over a minute. Both panorama modes run at half that - 15.03 - because each publishes on every second output frame boundary.</a:t>
             </a:r>
             <a:endParaRPr lang="en-US" sz="1250" dirty="0"/>
           </a:p>
@@ -17697,7 +17395,7 @@
                 <a:ea typeface="Calibri" pitchFamily="34" charset="-122"/>
                 <a:cs typeface="Calibri" pitchFamily="34" charset="-120"/>
               </a:rPr>
-              <a:t>This is a throughput limit, not a correctness one: no frames are lost, each is simply shown twice.</a:t>
+              <a:t>In EO panorama this also throttles the input: the six source buffers are only recycled when a frame is published, so half of each camera's output is discarded for want of a free buffer. The cameras themselves run at 30 Hz throughout.</a:t>
             </a:r>
             <a:endParaRPr lang="en-US" sz="1250" dirty="0"/>
           </a:p>

--- a/docs/latency/EO_IR_Panorama_Latency_Analysis.pptx
+++ b/docs/latency/EO_IR_Panorama_Latency_Analysis.pptx
@@ -4176,7 +4176,7 @@
                 <a:ea typeface="Calibri" pitchFamily="34" charset="-122"/>
                 <a:cs typeface="Calibri" pitchFamily="34" charset="-120"/>
               </a:rPr>
-              <a:t>A row's age when its frame completes, and its scan position, are quoted at their average; each ranges 0 to one frame</a:t>
+              <a:t>Typical and worst are NOT measured: they add a modelled average of a row's age when its frame completes and of its scan position, each 0 to one frame</a:t>
             </a:r>
             <a:endParaRPr lang="en-US" sz="1100" dirty="0"/>
           </a:p>
@@ -8685,7 +8685,7 @@
                 <a:ea typeface="Calibri" pitchFamily="34" charset="-122"/>
                 <a:cs typeface="Calibri" pitchFamily="34" charset="-120"/>
               </a:rPr>
-              <a:t>best case</a:t>
+              <a:t>best case (= the measured term alone)</a:t>
             </a:r>
             <a:endParaRPr lang="en-US" sz="1050" dirty="0"/>
           </a:p>
@@ -8862,7 +8862,7 @@
               <a:buNone/>
             </a:pPr>
             <a:r>
-              <a:rPr lang="en-US" sz="1200" dirty="0">
+              <a:rPr lang="en-US" sz="1000" dirty="0">
                 <a:solidFill>
                   <a:srgbClr val="9FB4D4"/>
                 </a:solidFill>
@@ -8870,7 +8870,7 @@
                 <a:ea typeface="Calibri" pitchFamily="34" charset="-122"/>
                 <a:cs typeface="Calibri" pitchFamily="34" charset="-120"/>
               </a:rPr>
-              <a:t>typical</a:t>
+              <a:t>typical = measured + 33 ms avg</a:t>
             </a:r>
             <a:endParaRPr lang="en-US" sz="2200" dirty="0"/>
           </a:p>
@@ -10614,7 +10614,7 @@
                 <a:ea typeface="Calibri" pitchFamily="34" charset="-122"/>
                 <a:cs typeface="Calibri" pitchFamily="34" charset="-120"/>
               </a:rPr>
-              <a:t>best case</a:t>
+              <a:t>best case (= the measured term alone)</a:t>
             </a:r>
             <a:endParaRPr lang="en-US" sz="1050" dirty="0"/>
           </a:p>
@@ -10791,7 +10791,7 @@
               <a:buNone/>
             </a:pPr>
             <a:r>
-              <a:rPr lang="en-US" sz="1200" dirty="0">
+              <a:rPr lang="en-US" sz="1000" dirty="0">
                 <a:solidFill>
                   <a:srgbClr val="9FB4D4"/>
                 </a:solidFill>
@@ -10799,7 +10799,7 @@
                 <a:ea typeface="Calibri" pitchFamily="34" charset="-122"/>
                 <a:cs typeface="Calibri" pitchFamily="34" charset="-120"/>
               </a:rPr>
-              <a:t>typical</a:t>
+              <a:t>typical = measured + 33 ms avg</a:t>
             </a:r>
             <a:endParaRPr lang="en-US" sz="2200" dirty="0"/>
           </a:p>
@@ -12543,7 +12543,7 @@
                 <a:ea typeface="Calibri" pitchFamily="34" charset="-122"/>
                 <a:cs typeface="Calibri" pitchFamily="34" charset="-120"/>
               </a:rPr>
-              <a:t>best case</a:t>
+              <a:t>best case (= the measured term alone)</a:t>
             </a:r>
             <a:endParaRPr lang="en-US" sz="1050" dirty="0"/>
           </a:p>
@@ -12720,7 +12720,7 @@
               <a:buNone/>
             </a:pPr>
             <a:r>
-              <a:rPr lang="en-US" sz="1200" dirty="0">
+              <a:rPr lang="en-US" sz="1000" dirty="0">
                 <a:solidFill>
                   <a:srgbClr val="9FB4D4"/>
                 </a:solidFill>
@@ -12728,7 +12728,7 @@
                 <a:ea typeface="Calibri" pitchFamily="34" charset="-122"/>
                 <a:cs typeface="Calibri" pitchFamily="34" charset="-120"/>
               </a:rPr>
-              <a:t>typical</a:t>
+              <a:t>typical = measured + 33 ms avg</a:t>
             </a:r>
             <a:endParaRPr lang="en-US" sz="2200" dirty="0"/>
           </a:p>
@@ -14472,7 +14472,7 @@
                 <a:ea typeface="Calibri" pitchFamily="34" charset="-122"/>
                 <a:cs typeface="Calibri" pitchFamily="34" charset="-120"/>
               </a:rPr>
-              <a:t>best case</a:t>
+              <a:t>best case (= the measured term alone)</a:t>
             </a:r>
             <a:endParaRPr lang="en-US" sz="1050" dirty="0"/>
           </a:p>
@@ -14649,7 +14649,7 @@
               <a:buNone/>
             </a:pPr>
             <a:r>
-              <a:rPr lang="en-US" sz="1200" dirty="0">
+              <a:rPr lang="en-US" sz="1000" dirty="0">
                 <a:solidFill>
                   <a:srgbClr val="9FB4D4"/>
                 </a:solidFill>
@@ -14657,7 +14657,7 @@
                 <a:ea typeface="Calibri" pitchFamily="34" charset="-122"/>
                 <a:cs typeface="Calibri" pitchFamily="34" charset="-120"/>
               </a:rPr>
-              <a:t>typical</a:t>
+              <a:t>typical = measured + 33 ms avg</a:t>
             </a:r>
             <a:endParaRPr lang="en-US" sz="2200" dirty="0"/>
           </a:p>
@@ -14886,7 +14886,7 @@
                 <a:ea typeface="Calibri" pitchFamily="34" charset="-122"/>
                 <a:cs typeface="Calibri" pitchFamily="34" charset="-120"/>
               </a:rPr>
-              <a:t>Measured on hardware, 2026-08-19. FPGA-internal; camera sensor and ISP delay is additional and is the vendor's specification.</a:t>
+              <a:t>Only the middle term of each figure is measured; best case IS that measurement. Typical adds a 33 ms modelled average, worst adds 67 ms. Camera sensor and ISP delay is extra.</a:t>
             </a:r>
             <a:endParaRPr lang="en-US" sz="1250" dirty="0"/>
           </a:p>

--- a/docs/latency/EO_IR_Panorama_Latency_Analysis.pptx
+++ b/docs/latency/EO_IR_Panorama_Latency_Analysis.pptx
@@ -1041,7 +1041,7 @@
           <a:p>
             <a:r>
               <a:rPr lang="en-US" dirty="0"/>
-              <a:t/>
+              <a:t>The IR panorama reference event read 15 Hz in that capture where the genlock says 30 - already recorded as untrustworthy in MEASURED_20260819. Re-measuring latency on the IR-DDR branch needs the timing probe ported to it; that branch has never carried it.</a:t>
             </a:r>
             <a:endParaRPr lang="en-US" dirty="0"/>
           </a:p>
@@ -9075,7 +9075,7 @@
               <a:buNone/>
             </a:pPr>
             <a:r>
-              <a:rPr lang="en-US" sz="1300" dirty="0">
+              <a:rPr lang="en-US" sz="1250" dirty="0">
                 <a:solidFill>
                   <a:srgbClr val="27374F"/>
                 </a:solidFill>
@@ -9083,9 +9083,9 @@
                 <a:ea typeface="Calibri" pitchFamily="34" charset="-122"/>
                 <a:cs typeface="Calibri" pitchFamily="34" charset="-120"/>
               </a:rPr>
-              <a:t>A finished frame may only be published on a display frame edge. The camera and the display free-run against each other, so the wait for that edge is anywhere from nothing to a full frame period. That is the entire difference between the two columns.</a:t>
-            </a:r>
-            <a:endParaRPr lang="en-US" sz="1300" dirty="0"/>
+              <a:t>A finished frame may only be published on a display frame edge, and the camera does not track the display. The wait for that edge is anywhere from nothing to a full frame period, and that is the entire difference between the two columns.</a:t>
+            </a:r>
+            <a:endParaRPr lang="en-US" sz="1250" dirty="0"/>
           </a:p>
         </p:txBody>
       </p:sp>
@@ -9098,7 +9098,7 @@
         <p:spPr>
           <a:xfrm>
             <a:off x="548640" y="1700784"/>
-            <a:ext cx="2468880" cy="310896"/>
+            <a:ext cx="2057400" cy="310896"/>
           </a:xfrm>
           <a:prstGeom prst="rect">
             <a:avLst/>
@@ -9136,8 +9136,8 @@
         </p:nvSpPr>
         <p:spPr>
           <a:xfrm>
-            <a:off x="3017520" y="1700784"/>
-            <a:ext cx="2606040" cy="310896"/>
+            <a:off x="2606040" y="1700784"/>
+            <a:ext cx="1965960" cy="310896"/>
           </a:xfrm>
           <a:prstGeom prst="rect">
             <a:avLst/>
@@ -9161,7 +9161,7 @@
                 <a:ea typeface="Calibri" pitchFamily="34" charset="-122"/>
                 <a:cs typeface="Calibri" pitchFamily="34" charset="-120"/>
               </a:rPr>
-              <a:t>Frame complete → render done</a:t>
+              <a:t>Render occupancy</a:t>
             </a:r>
             <a:endParaRPr lang="en-US" sz="1050" dirty="0"/>
           </a:p>
@@ -9178,7 +9178,7 @@
                 <a:ea typeface="Calibri" pitchFamily="34" charset="-122"/>
                 <a:cs typeface="Calibri" pitchFamily="34" charset="-120"/>
               </a:rPr>
-              <a:t>(ILA, measured)</a:t>
+              <a:t>(ILA, untriggered)</a:t>
             </a:r>
             <a:endParaRPr lang="en-US" sz="1050" dirty="0"/>
           </a:p>
@@ -9192,8 +9192,8 @@
         </p:nvSpPr>
         <p:spPr>
           <a:xfrm>
-            <a:off x="5623560" y="1700784"/>
-            <a:ext cx="2011680" cy="310896"/>
+            <a:off x="4572000" y="1700784"/>
+            <a:ext cx="2148840" cy="310896"/>
           </a:xfrm>
           <a:prstGeom prst="rect">
             <a:avLst/>
@@ -9217,6 +9217,62 @@
                 <a:ea typeface="Calibri" pitchFamily="34" charset="-122"/>
                 <a:cs typeface="Calibri" pitchFamily="34" charset="-120"/>
               </a:rPr>
+              <a:t>Frame → render done</a:t>
+            </a:r>
+            <a:endParaRPr lang="en-US" sz="1050" dirty="0"/>
+          </a:p>
+          <a:p>
+            <a:pPr algn="ctr" indent="0" marL="0">
+              <a:buNone/>
+            </a:pPr>
+            <a:r>
+              <a:rPr lang="en-US" sz="1050" b="1" dirty="0">
+                <a:solidFill>
+                  <a:srgbClr val="6B7C97"/>
+                </a:solidFill>
+                <a:latin typeface="Calibri" pitchFamily="34" charset="0"/>
+                <a:ea typeface="Calibri" pitchFamily="34" charset="-122"/>
+                <a:cs typeface="Calibri" pitchFamily="34" charset="-120"/>
+              </a:rPr>
+              <a:t>= fixed wait + render</a:t>
+            </a:r>
+            <a:endParaRPr lang="en-US" sz="1050" dirty="0"/>
+          </a:p>
+        </p:txBody>
+      </p:sp>
+      <p:sp>
+        <p:nvSpPr>
+          <p:cNvPr id="8" name="Text 6"/>
+          <p:cNvSpPr/>
+          <p:nvPr/>
+        </p:nvSpPr>
+        <p:spPr>
+          <a:xfrm>
+            <a:off x="6720840" y="1700784"/>
+            <a:ext cx="1691640" cy="310896"/>
+          </a:xfrm>
+          <a:prstGeom prst="rect">
+            <a:avLst/>
+          </a:prstGeom>
+          <a:noFill/>
+          <a:ln/>
+        </p:spPr>
+        <p:txBody>
+          <a:bodyPr wrap="square" lIns="0" tIns="0" rIns="0" bIns="0" rtlCol="0" anchor="ctr"/>
+          <a:lstStyle/>
+          <a:p>
+            <a:pPr algn="ctr" indent="0" marL="0">
+              <a:buNone/>
+            </a:pPr>
+            <a:r>
+              <a:rPr lang="en-US" sz="1050" b="1" dirty="0">
+                <a:solidFill>
+                  <a:srgbClr val="6B7C97"/>
+                </a:solidFill>
+                <a:latin typeface="Calibri" pitchFamily="34" charset="0"/>
+                <a:ea typeface="Calibri" pitchFamily="34" charset="-122"/>
+                <a:cs typeface="Calibri" pitchFamily="34" charset="-120"/>
+              </a:rPr>
               <a:t>BEST CASE</a:t>
             </a:r>
             <a:endParaRPr lang="en-US" sz="1050" dirty="0"/>
@@ -9242,14 +9298,14 @@
       </p:sp>
       <p:sp>
         <p:nvSpPr>
-          <p:cNvPr id="8" name="Text 6"/>
-          <p:cNvSpPr/>
-          <p:nvPr/>
-        </p:nvSpPr>
-        <p:spPr>
-          <a:xfrm>
-            <a:off x="7635240" y="1700784"/>
-            <a:ext cx="2011680" cy="310896"/>
+          <p:cNvPr id="9" name="Text 7"/>
+          <p:cNvSpPr/>
+          <p:nvPr/>
+        </p:nvSpPr>
+        <p:spPr>
+          <a:xfrm>
+            <a:off x="8412480" y="1700784"/>
+            <a:ext cx="1691640" cy="310896"/>
           </a:xfrm>
           <a:prstGeom prst="rect">
             <a:avLst/>
@@ -9298,14 +9354,14 @@
       </p:sp>
       <p:sp>
         <p:nvSpPr>
-          <p:cNvPr id="9" name="Text 7"/>
-          <p:cNvSpPr/>
-          <p:nvPr/>
-        </p:nvSpPr>
-        <p:spPr>
-          <a:xfrm>
-            <a:off x="9646920" y="1700784"/>
-            <a:ext cx="2011680" cy="310896"/>
+          <p:cNvPr id="10" name="Text 8"/>
+          <p:cNvSpPr/>
+          <p:nvPr/>
+        </p:nvSpPr>
+        <p:spPr>
+          <a:xfrm>
+            <a:off x="10104120" y="1700784"/>
+            <a:ext cx="1554480" cy="310896"/>
           </a:xfrm>
           <a:prstGeom prst="rect">
             <a:avLst/>
@@ -9329,7 +9385,7 @@
                 <a:ea typeface="Calibri" pitchFamily="34" charset="-122"/>
                 <a:cs typeface="Calibri" pitchFamily="34" charset="-120"/>
               </a:rPr>
-              <a:t>One measured sample</a:t>
+              <a:t>Publishing when</a:t>
             </a:r>
             <a:endParaRPr lang="en-US" sz="1050" dirty="0"/>
           </a:p>
@@ -9346,7 +9402,7 @@
                 <a:ea typeface="Calibri" pitchFamily="34" charset="-122"/>
                 <a:cs typeface="Calibri" pitchFamily="34" charset="-120"/>
               </a:rPr>
-              <a:t>(sits between, as it must)</a:t>
+              <a:t>this was measured</a:t>
             </a:r>
             <a:endParaRPr lang="en-US" sz="1050" dirty="0"/>
           </a:p>
@@ -9354,7 +9410,7 @@
       </p:sp>
       <p:sp>
         <p:nvSpPr>
-          <p:cNvPr id="10" name="Shape 8"/>
+          <p:cNvPr id="11" name="Shape 9"/>
           <p:cNvSpPr/>
           <p:nvPr/>
         </p:nvSpPr>
@@ -9377,14 +9433,14 @@
       </p:sp>
       <p:sp>
         <p:nvSpPr>
-          <p:cNvPr id="11" name="Text 9"/>
+          <p:cNvPr id="12" name="Text 10"/>
           <p:cNvSpPr/>
           <p:nvPr/>
         </p:nvSpPr>
         <p:spPr>
           <a:xfrm>
             <a:off x="548640" y="2103120"/>
-            <a:ext cx="2468880" cy="384048"/>
+            <a:ext cx="2057400" cy="365760"/>
           </a:xfrm>
           <a:prstGeom prst="rect">
             <a:avLst/>
@@ -9416,14 +9472,14 @@
       </p:sp>
       <p:sp>
         <p:nvSpPr>
-          <p:cNvPr id="12" name="Text 10"/>
-          <p:cNvSpPr/>
-          <p:nvPr/>
-        </p:nvSpPr>
-        <p:spPr>
-          <a:xfrm>
-            <a:off x="3017520" y="2103120"/>
-            <a:ext cx="2606040" cy="384048"/>
+          <p:cNvPr id="13" name="Text 11"/>
+          <p:cNvSpPr/>
+          <p:nvPr/>
+        </p:nvSpPr>
+        <p:spPr>
+          <a:xfrm>
+            <a:off x="2606040" y="2103120"/>
+            <a:ext cx="1965960" cy="365760"/>
           </a:xfrm>
           <a:prstGeom prst="rect">
             <a:avLst/>
@@ -9447,6 +9503,45 @@
                 <a:ea typeface="Calibri" pitchFamily="34" charset="-122"/>
                 <a:cs typeface="Calibri" pitchFamily="34" charset="-120"/>
               </a:rPr>
+              <a:t>~8.4 ms</a:t>
+            </a:r>
+            <a:endParaRPr lang="en-US" sz="1050" dirty="0"/>
+          </a:p>
+        </p:txBody>
+      </p:sp>
+      <p:sp>
+        <p:nvSpPr>
+          <p:cNvPr id="14" name="Text 12"/>
+          <p:cNvSpPr/>
+          <p:nvPr/>
+        </p:nvSpPr>
+        <p:spPr>
+          <a:xfrm>
+            <a:off x="4572000" y="2103120"/>
+            <a:ext cx="2148840" cy="365760"/>
+          </a:xfrm>
+          <a:prstGeom prst="rect">
+            <a:avLst/>
+          </a:prstGeom>
+          <a:noFill/>
+          <a:ln/>
+        </p:spPr>
+        <p:txBody>
+          <a:bodyPr wrap="square" lIns="0" tIns="0" rIns="0" bIns="0" rtlCol="0" anchor="ctr"/>
+          <a:lstStyle/>
+          <a:p>
+            <a:pPr algn="ctr" indent="0" marL="0">
+              <a:buNone/>
+            </a:pPr>
+            <a:r>
+              <a:rPr lang="en-US" sz="1050" dirty="0">
+                <a:solidFill>
+                  <a:srgbClr val="27374F"/>
+                </a:solidFill>
+                <a:latin typeface="Calibri" pitchFamily="34" charset="0"/>
+                <a:ea typeface="Calibri" pitchFamily="34" charset="-122"/>
+                <a:cs typeface="Calibri" pitchFamily="34" charset="-120"/>
+              </a:rPr>
               <a:t>10.1 ms</a:t>
             </a:r>
             <a:endParaRPr lang="en-US" sz="1050" dirty="0"/>
@@ -9455,14 +9550,14 @@
       </p:sp>
       <p:sp>
         <p:nvSpPr>
-          <p:cNvPr id="13" name="Text 11"/>
-          <p:cNvSpPr/>
-          <p:nvPr/>
-        </p:nvSpPr>
-        <p:spPr>
-          <a:xfrm>
-            <a:off x="5623560" y="2103120"/>
-            <a:ext cx="2011680" cy="384048"/>
+          <p:cNvPr id="15" name="Text 13"/>
+          <p:cNvSpPr/>
+          <p:nvPr/>
+        </p:nvSpPr>
+        <p:spPr>
+          <a:xfrm>
+            <a:off x="6720840" y="2103120"/>
+            <a:ext cx="1691640" cy="365760"/>
           </a:xfrm>
           <a:prstGeom prst="rect">
             <a:avLst/>
@@ -9494,14 +9589,14 @@
       </p:sp>
       <p:sp>
         <p:nvSpPr>
-          <p:cNvPr id="14" name="Text 12"/>
-          <p:cNvSpPr/>
-          <p:nvPr/>
-        </p:nvSpPr>
-        <p:spPr>
-          <a:xfrm>
-            <a:off x="7635240" y="2103120"/>
-            <a:ext cx="2011680" cy="384048"/>
+          <p:cNvPr id="16" name="Text 14"/>
+          <p:cNvSpPr/>
+          <p:nvPr/>
+        </p:nvSpPr>
+        <p:spPr>
+          <a:xfrm>
+            <a:off x="8412480" y="2103120"/>
+            <a:ext cx="1691640" cy="365760"/>
           </a:xfrm>
           <a:prstGeom prst="rect">
             <a:avLst/>
@@ -9533,14 +9628,14 @@
       </p:sp>
       <p:sp>
         <p:nvSpPr>
-          <p:cNvPr id="15" name="Text 13"/>
-          <p:cNvSpPr/>
-          <p:nvPr/>
-        </p:nvSpPr>
-        <p:spPr>
-          <a:xfrm>
-            <a:off x="9646920" y="2103120"/>
-            <a:ext cx="2011680" cy="384048"/>
+          <p:cNvPr id="17" name="Text 15"/>
+          <p:cNvSpPr/>
+          <p:nvPr/>
+        </p:nvSpPr>
+        <p:spPr>
+          <a:xfrm>
+            <a:off x="10104120" y="2103120"/>
+            <a:ext cx="1554480" cy="365760"/>
           </a:xfrm>
           <a:prstGeom prst="rect">
             <a:avLst/>
@@ -9564,7 +9659,7 @@
                 <a:ea typeface="Calibri" pitchFamily="34" charset="-122"/>
                 <a:cs typeface="Calibri" pitchFamily="34" charset="-120"/>
               </a:rPr>
-              <a:t>49.7 ms</a:t>
+              <a:t>29.75 fps</a:t>
             </a:r>
             <a:endParaRPr lang="en-US" sz="1050" dirty="0"/>
           </a:p>
@@ -9572,14 +9667,14 @@
       </p:sp>
       <p:sp>
         <p:nvSpPr>
-          <p:cNvPr id="16" name="Shape 14"/>
-          <p:cNvSpPr/>
-          <p:nvPr/>
-        </p:nvSpPr>
-        <p:spPr>
-          <a:xfrm>
-            <a:off x="475488" y="2496312"/>
-            <a:ext cx="11256264" cy="402336"/>
+          <p:cNvPr id="18" name="Shape 16"/>
+          <p:cNvSpPr/>
+          <p:nvPr/>
+        </p:nvSpPr>
+        <p:spPr>
+          <a:xfrm>
+            <a:off x="475488" y="2478024"/>
+            <a:ext cx="11256264" cy="384048"/>
           </a:xfrm>
           <a:prstGeom prst="rect">
             <a:avLst/>
@@ -9597,14 +9692,14 @@
       </p:sp>
       <p:sp>
         <p:nvSpPr>
-          <p:cNvPr id="17" name="Text 15"/>
-          <p:cNvSpPr/>
-          <p:nvPr/>
-        </p:nvSpPr>
-        <p:spPr>
-          <a:xfrm>
-            <a:off x="548640" y="2523744"/>
-            <a:ext cx="2468880" cy="384048"/>
+          <p:cNvPr id="19" name="Text 17"/>
+          <p:cNvSpPr/>
+          <p:nvPr/>
+        </p:nvSpPr>
+        <p:spPr>
+          <a:xfrm>
+            <a:off x="548640" y="2505456"/>
+            <a:ext cx="2057400" cy="365760"/>
           </a:xfrm>
           <a:prstGeom prst="rect">
             <a:avLst/>
@@ -9636,14 +9731,14 @@
       </p:sp>
       <p:sp>
         <p:nvSpPr>
-          <p:cNvPr id="18" name="Text 16"/>
-          <p:cNvSpPr/>
-          <p:nvPr/>
-        </p:nvSpPr>
-        <p:spPr>
-          <a:xfrm>
-            <a:off x="3017520" y="2523744"/>
-            <a:ext cx="2606040" cy="384048"/>
+          <p:cNvPr id="20" name="Text 18"/>
+          <p:cNvSpPr/>
+          <p:nvPr/>
+        </p:nvSpPr>
+        <p:spPr>
+          <a:xfrm>
+            <a:off x="2606040" y="2505456"/>
+            <a:ext cx="1965960" cy="365760"/>
           </a:xfrm>
           <a:prstGeom prst="rect">
             <a:avLst/>
@@ -9667,6 +9762,45 @@
                 <a:ea typeface="Calibri" pitchFamily="34" charset="-122"/>
                 <a:cs typeface="Calibri" pitchFamily="34" charset="-120"/>
               </a:rPr>
+              <a:t>~24.9 ms</a:t>
+            </a:r>
+            <a:endParaRPr lang="en-US" sz="1050" dirty="0"/>
+          </a:p>
+        </p:txBody>
+      </p:sp>
+      <p:sp>
+        <p:nvSpPr>
+          <p:cNvPr id="21" name="Text 19"/>
+          <p:cNvSpPr/>
+          <p:nvPr/>
+        </p:nvSpPr>
+        <p:spPr>
+          <a:xfrm>
+            <a:off x="4572000" y="2505456"/>
+            <a:ext cx="2148840" cy="365760"/>
+          </a:xfrm>
+          <a:prstGeom prst="rect">
+            <a:avLst/>
+          </a:prstGeom>
+          <a:noFill/>
+          <a:ln/>
+        </p:spPr>
+        <p:txBody>
+          <a:bodyPr wrap="square" lIns="0" tIns="0" rIns="0" bIns="0" rtlCol="0" anchor="ctr"/>
+          <a:lstStyle/>
+          <a:p>
+            <a:pPr algn="ctr" indent="0" marL="0">
+              <a:buNone/>
+            </a:pPr>
+            <a:r>
+              <a:rPr lang="en-US" sz="1050" dirty="0">
+                <a:solidFill>
+                  <a:srgbClr val="27374F"/>
+                </a:solidFill>
+                <a:latin typeface="Calibri" pitchFamily="34" charset="0"/>
+                <a:ea typeface="Calibri" pitchFamily="34" charset="-122"/>
+                <a:cs typeface="Calibri" pitchFamily="34" charset="-120"/>
+              </a:rPr>
               <a:t>38.2 ms</a:t>
             </a:r>
             <a:endParaRPr lang="en-US" sz="1050" dirty="0"/>
@@ -9675,14 +9809,14 @@
       </p:sp>
       <p:sp>
         <p:nvSpPr>
-          <p:cNvPr id="19" name="Text 17"/>
-          <p:cNvSpPr/>
-          <p:nvPr/>
-        </p:nvSpPr>
-        <p:spPr>
-          <a:xfrm>
-            <a:off x="5623560" y="2523744"/>
-            <a:ext cx="2011680" cy="384048"/>
+          <p:cNvPr id="22" name="Text 20"/>
+          <p:cNvSpPr/>
+          <p:nvPr/>
+        </p:nvSpPr>
+        <p:spPr>
+          <a:xfrm>
+            <a:off x="6720840" y="2505456"/>
+            <a:ext cx="1691640" cy="365760"/>
           </a:xfrm>
           <a:prstGeom prst="rect">
             <a:avLst/>
@@ -9714,14 +9848,14 @@
       </p:sp>
       <p:sp>
         <p:nvSpPr>
-          <p:cNvPr id="20" name="Text 18"/>
-          <p:cNvSpPr/>
-          <p:nvPr/>
-        </p:nvSpPr>
-        <p:spPr>
-          <a:xfrm>
-            <a:off x="7635240" y="2523744"/>
-            <a:ext cx="2011680" cy="384048"/>
+          <p:cNvPr id="23" name="Text 21"/>
+          <p:cNvSpPr/>
+          <p:nvPr/>
+        </p:nvSpPr>
+        <p:spPr>
+          <a:xfrm>
+            <a:off x="8412480" y="2505456"/>
+            <a:ext cx="1691640" cy="365760"/>
           </a:xfrm>
           <a:prstGeom prst="rect">
             <a:avLst/>
@@ -9753,14 +9887,14 @@
       </p:sp>
       <p:sp>
         <p:nvSpPr>
-          <p:cNvPr id="21" name="Text 19"/>
-          <p:cNvSpPr/>
-          <p:nvPr/>
-        </p:nvSpPr>
-        <p:spPr>
-          <a:xfrm>
-            <a:off x="9646920" y="2523744"/>
-            <a:ext cx="2011680" cy="384048"/>
+          <p:cNvPr id="24" name="Text 22"/>
+          <p:cNvSpPr/>
+          <p:nvPr/>
+        </p:nvSpPr>
+        <p:spPr>
+          <a:xfrm>
+            <a:off x="10104120" y="2505456"/>
+            <a:ext cx="1554480" cy="365760"/>
           </a:xfrm>
           <a:prstGeom prst="rect">
             <a:avLst/>
@@ -9778,13 +9912,52 @@
             <a:r>
               <a:rPr lang="en-US" sz="1050" dirty="0">
                 <a:solidFill>
+                  <a:srgbClr val="B4443A"/>
+                </a:solidFill>
+                <a:latin typeface="Calibri" pitchFamily="34" charset="0"/>
+                <a:ea typeface="Calibri" pitchFamily="34" charset="-122"/>
+                <a:cs typeface="Calibri" pitchFamily="34" charset="-120"/>
+              </a:rPr>
+              <a:t>15.03 fps</a:t>
+            </a:r>
+            <a:endParaRPr lang="en-US" sz="1050" dirty="0"/>
+          </a:p>
+        </p:txBody>
+      </p:sp>
+      <p:sp>
+        <p:nvSpPr>
+          <p:cNvPr id="25" name="Text 23"/>
+          <p:cNvSpPr/>
+          <p:nvPr/>
+        </p:nvSpPr>
+        <p:spPr>
+          <a:xfrm>
+            <a:off x="548640" y="2907792"/>
+            <a:ext cx="2057400" cy="365760"/>
+          </a:xfrm>
+          <a:prstGeom prst="rect">
+            <a:avLst/>
+          </a:prstGeom>
+          <a:noFill/>
+          <a:ln/>
+        </p:spPr>
+        <p:txBody>
+          <a:bodyPr wrap="square" lIns="0" tIns="0" rIns="0" bIns="0" rtlCol="0" anchor="ctr"/>
+          <a:lstStyle/>
+          <a:p>
+            <a:pPr algn="l" indent="0" marL="0">
+              <a:buNone/>
+            </a:pPr>
+            <a:r>
+              <a:rPr lang="en-US" sz="1050" dirty="0">
+                <a:solidFill>
                   <a:srgbClr val="27374F"/>
                 </a:solidFill>
                 <a:latin typeface="Calibri" pitchFamily="34" charset="0"/>
                 <a:ea typeface="Calibri" pitchFamily="34" charset="-122"/>
                 <a:cs typeface="Calibri" pitchFamily="34" charset="-120"/>
               </a:rPr>
-              <a:t>74.4 ms</a:t>
+              <a:t>IR single</a:t>
             </a:r>
             <a:endParaRPr lang="en-US" sz="1050" dirty="0"/>
           </a:p>
@@ -9792,26 +9965,26 @@
       </p:sp>
       <p:sp>
         <p:nvSpPr>
-          <p:cNvPr id="22" name="Text 20"/>
-          <p:cNvSpPr/>
-          <p:nvPr/>
-        </p:nvSpPr>
-        <p:spPr>
-          <a:xfrm>
-            <a:off x="548640" y="2944368"/>
-            <a:ext cx="2468880" cy="384048"/>
-          </a:xfrm>
-          <a:prstGeom prst="rect">
-            <a:avLst/>
-          </a:prstGeom>
-          <a:noFill/>
-          <a:ln/>
-        </p:spPr>
-        <p:txBody>
-          <a:bodyPr wrap="square" lIns="0" tIns="0" rIns="0" bIns="0" rtlCol="0" anchor="ctr"/>
-          <a:lstStyle/>
-          <a:p>
-            <a:pPr algn="l" indent="0" marL="0">
+          <p:cNvPr id="26" name="Text 24"/>
+          <p:cNvSpPr/>
+          <p:nvPr/>
+        </p:nvSpPr>
+        <p:spPr>
+          <a:xfrm>
+            <a:off x="2606040" y="2907792"/>
+            <a:ext cx="1965960" cy="365760"/>
+          </a:xfrm>
+          <a:prstGeom prst="rect">
+            <a:avLst/>
+          </a:prstGeom>
+          <a:noFill/>
+          <a:ln/>
+        </p:spPr>
+        <p:txBody>
+          <a:bodyPr wrap="square" lIns="0" tIns="0" rIns="0" bIns="0" rtlCol="0" anchor="ctr"/>
+          <a:lstStyle/>
+          <a:p>
+            <a:pPr algn="ctr" indent="0" marL="0">
               <a:buNone/>
             </a:pPr>
             <a:r>
@@ -9823,7 +9996,7 @@
                 <a:ea typeface="Calibri" pitchFamily="34" charset="-122"/>
                 <a:cs typeface="Calibri" pitchFamily="34" charset="-120"/>
               </a:rPr>
-              <a:t>IR single</a:t>
+              <a:t>not measured</a:t>
             </a:r>
             <a:endParaRPr lang="en-US" sz="1050" dirty="0"/>
           </a:p>
@@ -9831,14 +10004,14 @@
       </p:sp>
       <p:sp>
         <p:nvSpPr>
-          <p:cNvPr id="23" name="Text 21"/>
-          <p:cNvSpPr/>
-          <p:nvPr/>
-        </p:nvSpPr>
-        <p:spPr>
-          <a:xfrm>
-            <a:off x="3017520" y="2944368"/>
-            <a:ext cx="2606040" cy="384048"/>
+          <p:cNvPr id="27" name="Text 25"/>
+          <p:cNvSpPr/>
+          <p:nvPr/>
+        </p:nvSpPr>
+        <p:spPr>
+          <a:xfrm>
+            <a:off x="4572000" y="2907792"/>
+            <a:ext cx="2148840" cy="365760"/>
           </a:xfrm>
           <a:prstGeom prst="rect">
             <a:avLst/>
@@ -9870,14 +10043,14 @@
       </p:sp>
       <p:sp>
         <p:nvSpPr>
-          <p:cNvPr id="24" name="Text 22"/>
-          <p:cNvSpPr/>
-          <p:nvPr/>
-        </p:nvSpPr>
-        <p:spPr>
-          <a:xfrm>
-            <a:off x="5623560" y="2944368"/>
-            <a:ext cx="2011680" cy="384048"/>
+          <p:cNvPr id="28" name="Text 26"/>
+          <p:cNvSpPr/>
+          <p:nvPr/>
+        </p:nvSpPr>
+        <p:spPr>
+          <a:xfrm>
+            <a:off x="6720840" y="2907792"/>
+            <a:ext cx="1691640" cy="365760"/>
           </a:xfrm>
           <a:prstGeom prst="rect">
             <a:avLst/>
@@ -9909,14 +10082,14 @@
       </p:sp>
       <p:sp>
         <p:nvSpPr>
-          <p:cNvPr id="25" name="Text 23"/>
-          <p:cNvSpPr/>
-          <p:nvPr/>
-        </p:nvSpPr>
-        <p:spPr>
-          <a:xfrm>
-            <a:off x="7635240" y="2944368"/>
-            <a:ext cx="2011680" cy="384048"/>
+          <p:cNvPr id="29" name="Text 27"/>
+          <p:cNvSpPr/>
+          <p:nvPr/>
+        </p:nvSpPr>
+        <p:spPr>
+          <a:xfrm>
+            <a:off x="8412480" y="2907792"/>
+            <a:ext cx="1691640" cy="365760"/>
           </a:xfrm>
           <a:prstGeom prst="rect">
             <a:avLst/>
@@ -9948,14 +10121,14 @@
       </p:sp>
       <p:sp>
         <p:nvSpPr>
-          <p:cNvPr id="26" name="Text 24"/>
-          <p:cNvSpPr/>
-          <p:nvPr/>
-        </p:nvSpPr>
-        <p:spPr>
-          <a:xfrm>
-            <a:off x="9646920" y="2944368"/>
-            <a:ext cx="2011680" cy="384048"/>
+          <p:cNvPr id="30" name="Text 28"/>
+          <p:cNvSpPr/>
+          <p:nvPr/>
+        </p:nvSpPr>
+        <p:spPr>
+          <a:xfrm>
+            <a:off x="10104120" y="2907792"/>
+            <a:ext cx="1554480" cy="365760"/>
           </a:xfrm>
           <a:prstGeom prst="rect">
             <a:avLst/>
@@ -9979,7 +10152,7 @@
                 <a:ea typeface="Calibri" pitchFamily="34" charset="-122"/>
                 <a:cs typeface="Calibri" pitchFamily="34" charset="-120"/>
               </a:rPr>
-              <a:t>83.4 ms</a:t>
+              <a:t>30.01 fps</a:t>
             </a:r>
             <a:endParaRPr lang="en-US" sz="1050" dirty="0"/>
           </a:p>
@@ -9987,14 +10160,14 @@
       </p:sp>
       <p:sp>
         <p:nvSpPr>
-          <p:cNvPr id="27" name="Shape 25"/>
-          <p:cNvSpPr/>
-          <p:nvPr/>
-        </p:nvSpPr>
-        <p:spPr>
-          <a:xfrm>
-            <a:off x="475488" y="3337560"/>
-            <a:ext cx="11256264" cy="402336"/>
+          <p:cNvPr id="31" name="Shape 29"/>
+          <p:cNvSpPr/>
+          <p:nvPr/>
+        </p:nvSpPr>
+        <p:spPr>
+          <a:xfrm>
+            <a:off x="475488" y="3282696"/>
+            <a:ext cx="11256264" cy="384048"/>
           </a:xfrm>
           <a:prstGeom prst="rect">
             <a:avLst/>
@@ -10012,14 +10185,14 @@
       </p:sp>
       <p:sp>
         <p:nvSpPr>
-          <p:cNvPr id="28" name="Text 26"/>
-          <p:cNvSpPr/>
-          <p:nvPr/>
-        </p:nvSpPr>
-        <p:spPr>
-          <a:xfrm>
-            <a:off x="548640" y="3364992"/>
-            <a:ext cx="2468880" cy="384048"/>
+          <p:cNvPr id="32" name="Text 30"/>
+          <p:cNvSpPr/>
+          <p:nvPr/>
+        </p:nvSpPr>
+        <p:spPr>
+          <a:xfrm>
+            <a:off x="548640" y="3310128"/>
+            <a:ext cx="2057400" cy="365760"/>
           </a:xfrm>
           <a:prstGeom prst="rect">
             <a:avLst/>
@@ -10051,14 +10224,14 @@
       </p:sp>
       <p:sp>
         <p:nvSpPr>
-          <p:cNvPr id="29" name="Text 27"/>
-          <p:cNvSpPr/>
-          <p:nvPr/>
-        </p:nvSpPr>
-        <p:spPr>
-          <a:xfrm>
-            <a:off x="3017520" y="3364992"/>
-            <a:ext cx="2606040" cy="384048"/>
+          <p:cNvPr id="33" name="Text 31"/>
+          <p:cNvSpPr/>
+          <p:nvPr/>
+        </p:nvSpPr>
+        <p:spPr>
+          <a:xfrm>
+            <a:off x="2606040" y="3310128"/>
+            <a:ext cx="1965960" cy="365760"/>
           </a:xfrm>
           <a:prstGeom prst="rect">
             <a:avLst/>
@@ -10082,6 +10255,45 @@
                 <a:ea typeface="Calibri" pitchFamily="34" charset="-122"/>
                 <a:cs typeface="Calibri" pitchFamily="34" charset="-120"/>
               </a:rPr>
+              <a:t>~26.6 ms</a:t>
+            </a:r>
+            <a:endParaRPr lang="en-US" sz="1050" dirty="0"/>
+          </a:p>
+        </p:txBody>
+      </p:sp>
+      <p:sp>
+        <p:nvSpPr>
+          <p:cNvPr id="34" name="Text 32"/>
+          <p:cNvSpPr/>
+          <p:nvPr/>
+        </p:nvSpPr>
+        <p:spPr>
+          <a:xfrm>
+            <a:off x="4572000" y="3310128"/>
+            <a:ext cx="2148840" cy="365760"/>
+          </a:xfrm>
+          <a:prstGeom prst="rect">
+            <a:avLst/>
+          </a:prstGeom>
+          <a:noFill/>
+          <a:ln/>
+        </p:spPr>
+        <p:txBody>
+          <a:bodyPr wrap="square" lIns="0" tIns="0" rIns="0" bIns="0" rtlCol="0" anchor="ctr"/>
+          <a:lstStyle/>
+          <a:p>
+            <a:pPr algn="ctr" indent="0" marL="0">
+              <a:buNone/>
+            </a:pPr>
+            <a:r>
+              <a:rPr lang="en-US" sz="1050" dirty="0">
+                <a:solidFill>
+                  <a:srgbClr val="27374F"/>
+                </a:solidFill>
+                <a:latin typeface="Calibri" pitchFamily="34" charset="0"/>
+                <a:ea typeface="Calibri" pitchFamily="34" charset="-122"/>
+                <a:cs typeface="Calibri" pitchFamily="34" charset="-120"/>
+              </a:rPr>
               <a:t>41.6 ms</a:t>
             </a:r>
             <a:endParaRPr lang="en-US" sz="1050" dirty="0"/>
@@ -10090,14 +10302,14 @@
       </p:sp>
       <p:sp>
         <p:nvSpPr>
-          <p:cNvPr id="30" name="Text 28"/>
-          <p:cNvSpPr/>
-          <p:nvPr/>
-        </p:nvSpPr>
-        <p:spPr>
-          <a:xfrm>
-            <a:off x="5623560" y="3364992"/>
-            <a:ext cx="2011680" cy="384048"/>
+          <p:cNvPr id="35" name="Text 33"/>
+          <p:cNvSpPr/>
+          <p:nvPr/>
+        </p:nvSpPr>
+        <p:spPr>
+          <a:xfrm>
+            <a:off x="6720840" y="3310128"/>
+            <a:ext cx="1691640" cy="365760"/>
           </a:xfrm>
           <a:prstGeom prst="rect">
             <a:avLst/>
@@ -10129,14 +10341,14 @@
       </p:sp>
       <p:sp>
         <p:nvSpPr>
-          <p:cNvPr id="31" name="Text 29"/>
-          <p:cNvSpPr/>
-          <p:nvPr/>
-        </p:nvSpPr>
-        <p:spPr>
-          <a:xfrm>
-            <a:off x="7635240" y="3364992"/>
-            <a:ext cx="2011680" cy="384048"/>
+          <p:cNvPr id="36" name="Text 34"/>
+          <p:cNvSpPr/>
+          <p:nvPr/>
+        </p:nvSpPr>
+        <p:spPr>
+          <a:xfrm>
+            <a:off x="8412480" y="3310128"/>
+            <a:ext cx="1691640" cy="365760"/>
           </a:xfrm>
           <a:prstGeom prst="rect">
             <a:avLst/>
@@ -10168,14 +10380,14 @@
       </p:sp>
       <p:sp>
         <p:nvSpPr>
-          <p:cNvPr id="32" name="Text 30"/>
-          <p:cNvSpPr/>
-          <p:nvPr/>
-        </p:nvSpPr>
-        <p:spPr>
-          <a:xfrm>
-            <a:off x="9646920" y="3364992"/>
-            <a:ext cx="2011680" cy="384048"/>
+          <p:cNvPr id="37" name="Text 35"/>
+          <p:cNvSpPr/>
+          <p:nvPr/>
+        </p:nvSpPr>
+        <p:spPr>
+          <a:xfrm>
+            <a:off x="10104120" y="3310128"/>
+            <a:ext cx="1554480" cy="365760"/>
           </a:xfrm>
           <a:prstGeom prst="rect">
             <a:avLst/>
@@ -10193,13 +10405,13 @@
             <a:r>
               <a:rPr lang="en-US" sz="1050" dirty="0">
                 <a:solidFill>
-                  <a:srgbClr val="27374F"/>
-                </a:solidFill>
-                <a:latin typeface="Calibri" pitchFamily="34" charset="0"/>
-                <a:ea typeface="Calibri" pitchFamily="34" charset="-122"/>
-                <a:cs typeface="Calibri" pitchFamily="34" charset="-120"/>
-              </a:rPr>
-              <a:t>78.3 ms</a:t>
+                  <a:srgbClr val="B4443A"/>
+                </a:solidFill>
+                <a:latin typeface="Calibri" pitchFamily="34" charset="0"/>
+                <a:ea typeface="Calibri" pitchFamily="34" charset="-122"/>
+                <a:cs typeface="Calibri" pitchFamily="34" charset="-120"/>
+              </a:rPr>
+              <a:t>15.03 fps</a:t>
             </a:r>
             <a:endParaRPr lang="en-US" sz="1050" dirty="0"/>
           </a:p>
@@ -10207,57 +10419,140 @@
       </p:sp>
       <p:sp>
         <p:nvSpPr>
-          <p:cNvPr id="33" name="Text 31"/>
-          <p:cNvSpPr/>
-          <p:nvPr/>
-        </p:nvSpPr>
-        <p:spPr>
-          <a:xfrm>
-            <a:off x="548640" y="3858768"/>
-            <a:ext cx="11109960" cy="274320"/>
-          </a:xfrm>
-          <a:prstGeom prst="rect">
-            <a:avLst/>
-          </a:prstGeom>
-          <a:noFill/>
-          <a:ln/>
-        </p:spPr>
-        <p:txBody>
-          <a:bodyPr wrap="square" lIns="0" tIns="0" rIns="0" bIns="0" rtlCol="0" anchor="ctr"/>
-          <a:lstStyle/>
-          <a:p>
-            <a:pPr indent="0" marL="0">
-              <a:buNone/>
-            </a:pPr>
-            <a:r>
-              <a:rPr lang="en-US" sz="1150" i="1" dirty="0">
-                <a:solidFill>
-                  <a:srgbClr val="6B7C97"/>
-                </a:solidFill>
-                <a:latin typeface="Calibri" pitchFamily="34" charset="0"/>
-                <a:ea typeface="Calibri" pitchFamily="34" charset="-122"/>
-                <a:cs typeface="Calibri" pitchFamily="34" charset="-120"/>
-              </a:rPr>
-              <a:t>Best case = 33.3 ms of fixed capture-and-scan-out geometry + the measured render.   Worst case = that + one 33.3 ms frame period.</a:t>
-            </a:r>
-            <a:endParaRPr lang="en-US" sz="1150" dirty="0"/>
-          </a:p>
-        </p:txBody>
-      </p:sp>
-      <p:sp>
-        <p:nvSpPr>
-          <p:cNvPr id="34" name="Shape 32"/>
-          <p:cNvSpPr/>
-          <p:nvPr/>
-        </p:nvSpPr>
-        <p:spPr>
-          <a:xfrm>
-            <a:off x="548640" y="4224528"/>
-            <a:ext cx="11109960" cy="1353312"/>
+          <p:cNvPr id="38" name="Shape 36"/>
+          <p:cNvSpPr/>
+          <p:nvPr/>
+        </p:nvSpPr>
+        <p:spPr>
+          <a:xfrm>
+            <a:off x="548640" y="3611880"/>
+            <a:ext cx="5532120" cy="1481328"/>
           </a:xfrm>
           <a:prstGeom prst="roundRect">
             <a:avLst>
-              <a:gd name="adj" fmla="val 4054"/>
+              <a:gd name="adj" fmla="val 3704"/>
+            </a:avLst>
+          </a:prstGeom>
+          <a:solidFill>
+            <a:srgbClr val="DAF2EB"/>
+          </a:solidFill>
+          <a:ln w="15875">
+            <a:solidFill>
+              <a:srgbClr val="02A37A"/>
+            </a:solidFill>
+            <a:prstDash val="solid"/>
+          </a:ln>
+        </p:spPr>
+      </p:sp>
+      <p:sp>
+        <p:nvSpPr>
+          <p:cNvPr id="39" name="Text 37"/>
+          <p:cNvSpPr/>
+          <p:nvPr/>
+        </p:nvSpPr>
+        <p:spPr>
+          <a:xfrm>
+            <a:off x="777240" y="3712464"/>
+            <a:ext cx="5074920" cy="274320"/>
+          </a:xfrm>
+          <a:prstGeom prst="rect">
+            <a:avLst/>
+          </a:prstGeom>
+          <a:noFill/>
+          <a:ln/>
+        </p:spPr>
+        <p:txBody>
+          <a:bodyPr wrap="square" lIns="0" tIns="0" rIns="0" bIns="0" rtlCol="0" anchor="ctr"/>
+          <a:lstStyle/>
+          <a:p>
+            <a:pPr indent="0" marL="0">
+              <a:buNone/>
+            </a:pPr>
+            <a:r>
+              <a:rPr lang="en-US" sz="1250" b="1" dirty="0">
+                <a:solidFill>
+                  <a:srgbClr val="0E1C36"/>
+                </a:solidFill>
+                <a:latin typeface="Calibri" pitchFamily="34" charset="0"/>
+                <a:ea typeface="Calibri" pitchFamily="34" charset="-122"/>
+                <a:cs typeface="Calibri" pitchFamily="34" charset="-120"/>
+              </a:rPr>
+              <a:t>Why 41.6 ms does not cap throughput at 24 fps</a:t>
+            </a:r>
+            <a:endParaRPr lang="en-US" sz="1250" dirty="0"/>
+          </a:p>
+        </p:txBody>
+      </p:sp>
+      <p:sp>
+        <p:nvSpPr>
+          <p:cNvPr id="40" name="Text 38"/>
+          <p:cNvSpPr/>
+          <p:nvPr/>
+        </p:nvSpPr>
+        <p:spPr>
+          <a:xfrm>
+            <a:off x="777240" y="4023360"/>
+            <a:ext cx="5074920" cy="1005840"/>
+          </a:xfrm>
+          <a:prstGeom prst="rect">
+            <a:avLst/>
+          </a:prstGeom>
+          <a:noFill/>
+          <a:ln/>
+        </p:spPr>
+        <p:txBody>
+          <a:bodyPr wrap="square" lIns="0" tIns="0" rIns="0" bIns="0" rtlCol="0" anchor="ctr"/>
+          <a:lstStyle/>
+          <a:p>
+            <a:pPr indent="0" marL="0">
+              <a:buNone/>
+            </a:pPr>
+            <a:r>
+              <a:rPr lang="en-US" sz="1100" dirty="0">
+                <a:solidFill>
+                  <a:srgbClr val="27374F"/>
+                </a:solidFill>
+                <a:latin typeface="Calibri" pitchFamily="34" charset="0"/>
+                <a:ea typeface="Calibri" pitchFamily="34" charset="-122"/>
+                <a:cs typeface="Calibri" pitchFamily="34" charset="-120"/>
+              </a:rPr>
+              <a:t>The middle column is a latency, not an occupancy. It is a fixed phase wait plus the render — for IR panorama, about 15 ms of waiting for the row window to open, then a 26.6 ms render.</a:t>
+            </a:r>
+            <a:endParaRPr lang="en-US" sz="1100" dirty="0"/>
+          </a:p>
+          <a:p>
+            <a:pPr indent="0" marL="0">
+              <a:buNone/>
+            </a:pPr>
+            <a:r>
+              <a:rPr lang="en-US" sz="1100" dirty="0">
+                <a:solidFill>
+                  <a:srgbClr val="27374F"/>
+                </a:solidFill>
+                <a:latin typeface="Calibri" pitchFamily="34" charset="0"/>
+                <a:ea typeface="Calibri" pitchFamily="34" charset="-122"/>
+                <a:cs typeface="Calibri" pitchFamily="34" charset="-120"/>
+              </a:rPr>
+              <a:t>Only the render occupies the engine, and 26.6 ms fits inside 33.3 ms. The wait is a constant offset: it delays every frame equally and costs nothing per frame. Renders never overlap, so throughput is set by the occupancy alone.</a:t>
+            </a:r>
+            <a:endParaRPr lang="en-US" sz="1100" dirty="0"/>
+          </a:p>
+        </p:txBody>
+      </p:sp>
+      <p:sp>
+        <p:nvSpPr>
+          <p:cNvPr id="41" name="Shape 39"/>
+          <p:cNvSpPr/>
+          <p:nvPr/>
+        </p:nvSpPr>
+        <p:spPr>
+          <a:xfrm>
+            <a:off x="6263640" y="3611880"/>
+            <a:ext cx="5394960" cy="1481328"/>
+          </a:xfrm>
+          <a:prstGeom prst="roundRect">
+            <a:avLst>
+              <a:gd name="adj" fmla="val 3704"/>
             </a:avLst>
           </a:prstGeom>
           <a:solidFill>
@@ -10273,14 +10568,14 @@
       </p:sp>
       <p:sp>
         <p:nvSpPr>
-          <p:cNvPr id="35" name="Text 33"/>
-          <p:cNvSpPr/>
-          <p:nvPr/>
-        </p:nvSpPr>
-        <p:spPr>
-          <a:xfrm>
-            <a:off x="804672" y="4315968"/>
-            <a:ext cx="10607040" cy="274320"/>
+          <p:cNvPr id="42" name="Text 40"/>
+          <p:cNvSpPr/>
+          <p:nvPr/>
+        </p:nvSpPr>
+        <p:spPr>
+          <a:xfrm>
+            <a:off x="6492240" y="3712464"/>
+            <a:ext cx="4937760" cy="274320"/>
           </a:xfrm>
           <a:prstGeom prst="rect">
             <a:avLst/>
@@ -10296,7 +10591,7 @@
               <a:buNone/>
             </a:pPr>
             <a:r>
-              <a:rPr lang="en-US" sz="1400" b="1" dirty="0">
+              <a:rPr lang="en-US" sz="1250" b="1" dirty="0">
                 <a:solidFill>
                   <a:srgbClr val="0E1C36"/>
                 </a:solidFill>
@@ -10306,20 +10601,20 @@
               </a:rPr>
               <a:t>Why the worst case occurs</a:t>
             </a:r>
-            <a:endParaRPr lang="en-US" sz="1400" dirty="0"/>
-          </a:p>
-        </p:txBody>
-      </p:sp>
-      <p:sp>
-        <p:nvSpPr>
-          <p:cNvPr id="36" name="Text 34"/>
-          <p:cNvSpPr/>
-          <p:nvPr/>
-        </p:nvSpPr>
-        <p:spPr>
-          <a:xfrm>
-            <a:off x="804672" y="4608576"/>
-            <a:ext cx="10607040" cy="914400"/>
+            <a:endParaRPr lang="en-US" sz="1250" dirty="0"/>
+          </a:p>
+        </p:txBody>
+      </p:sp>
+      <p:sp>
+        <p:nvSpPr>
+          <p:cNvPr id="43" name="Text 41"/>
+          <p:cNvSpPr/>
+          <p:nvPr/>
+        </p:nvSpPr>
+        <p:spPr>
+          <a:xfrm>
+            <a:off x="6492240" y="4023360"/>
+            <a:ext cx="4937760" cy="1005840"/>
           </a:xfrm>
           <a:prstGeom prst="rect">
             <a:avLst/>
@@ -10343,7 +10638,7 @@
                 <a:ea typeface="Calibri" pitchFamily="34" charset="-122"/>
                 <a:cs typeface="Calibri" pitchFamily="34" charset="-120"/>
               </a:rPr>
-              <a:t>The render finishes at some moment inside the display's 33.3 ms cycle, and it cannot choose that moment: its start is locked to the camera, and the camera is not locked to the display. Finish a hair before an edge and the frame goes out immediately — best case. Finish a hair after one and it is held for a whole further period — worst case.</a:t>
+              <a:t>The render finishes at some moment inside the display's 33.3 ms cycle and cannot choose that moment. Finish just before an edge and the frame goes out at once; finish just after one and it is held a whole further period.</a:t>
             </a:r>
             <a:endParaRPr lang="en-US" sz="1100" dirty="0"/>
           </a:p>
@@ -10352,7 +10647,7 @@
               <a:buNone/>
             </a:pPr>
             <a:r>
-              <a:rPr lang="en-US" sz="1100" i="1" dirty="0">
+              <a:rPr lang="en-US" sz="1100" dirty="0">
                 <a:solidFill>
                   <a:srgbClr val="27374F"/>
                 </a:solidFill>
@@ -10360,16 +10655,65 @@
                 <a:ea typeface="Calibri" pitchFamily="34" charset="-122"/>
                 <a:cs typeface="Calibri" pitchFamily="34" charset="-120"/>
               </a:rPr>
-              <a:t>This is a continuous drift, not an occasional fault. Over minutes the phase walks through the whole range, so latency wanders between the two columns rather than sitting at either. There is no single "typical" value to quote, which is why none is given.</a:t>
+              <a:t>This is a continuous drift, not an occasional fault — which is why no single "typical" value is quoted. Shortening the render moves both columns down; locking the camera to the display raster would collapse them to one.</a:t>
             </a:r>
             <a:endParaRPr lang="en-US" sz="1100" dirty="0"/>
           </a:p>
+        </p:txBody>
+      </p:sp>
+      <p:sp>
+        <p:nvSpPr>
+          <p:cNvPr id="44" name="Shape 42"/>
+          <p:cNvSpPr/>
+          <p:nvPr/>
+        </p:nvSpPr>
+        <p:spPr>
+          <a:xfrm>
+            <a:off x="548640" y="5230368"/>
+            <a:ext cx="11109960" cy="749808"/>
+          </a:xfrm>
+          <a:prstGeom prst="roundRect">
+            <a:avLst>
+              <a:gd name="adj" fmla="val 7317"/>
+            </a:avLst>
+          </a:prstGeom>
+          <a:solidFill>
+            <a:srgbClr val="F6E2E0"/>
+          </a:solidFill>
+          <a:ln w="15875">
+            <a:solidFill>
+              <a:srgbClr val="B4443A"/>
+            </a:solidFill>
+            <a:prstDash val="solid"/>
+          </a:ln>
+        </p:spPr>
+      </p:sp>
+      <p:sp>
+        <p:nvSpPr>
+          <p:cNvPr id="45" name="Text 43"/>
+          <p:cNvSpPr/>
+          <p:nvPr/>
+        </p:nvSpPr>
+        <p:spPr>
+          <a:xfrm>
+            <a:off x="777240" y="5321808"/>
+            <a:ext cx="10652760" cy="603504"/>
+          </a:xfrm>
+          <a:prstGeom prst="rect">
+            <a:avLst/>
+          </a:prstGeom>
+          <a:noFill/>
+          <a:ln/>
+        </p:spPr>
+        <p:txBody>
+          <a:bodyPr wrap="square" lIns="0" tIns="0" rIns="0" bIns="0" rtlCol="0" anchor="ctr"/>
+          <a:lstStyle/>
           <a:p>
             <a:pPr indent="0" marL="0">
               <a:buNone/>
             </a:pPr>
             <a:r>
-              <a:rPr lang="en-US" sz="1100" b="1" dirty="0">
+              <a:rPr lang="en-US" sz="1050" b="1" dirty="0">
                 <a:solidFill>
                   <a:srgbClr val="0E1C36"/>
                 </a:solidFill>
@@ -10377,48 +10721,23 @@
                 <a:ea typeface="Calibri" pitchFamily="34" charset="-122"/>
                 <a:cs typeface="Calibri" pitchFamily="34" charset="-120"/>
               </a:rPr>
-              <a:t>Shortening the render moves BOTH columns down. Locking the camera exposure to the display raster would collapse the range to one value.</a:t>
-            </a:r>
-            <a:endParaRPr lang="en-US" sz="1100" dirty="0"/>
-          </a:p>
-        </p:txBody>
-      </p:sp>
-      <p:sp>
-        <p:nvSpPr>
-          <p:cNvPr id="37" name="Text 35"/>
-          <p:cNvSpPr/>
-          <p:nvPr/>
-        </p:nvSpPr>
-        <p:spPr>
-          <a:xfrm>
-            <a:off x="548640" y="5705856"/>
-            <a:ext cx="11109960" cy="457200"/>
-          </a:xfrm>
-          <a:prstGeom prst="rect">
-            <a:avLst/>
-          </a:prstGeom>
-          <a:noFill/>
-          <a:ln/>
-        </p:spPr>
-        <p:txBody>
-          <a:bodyPr wrap="square" lIns="0" tIns="0" rIns="0" bIns="0" rtlCol="0" anchor="t"/>
-          <a:lstStyle/>
-          <a:p>
+              <a:t>Scope of the two flagged rows. </a:t>
+            </a:r>
             <a:pPr indent="0" marL="0">
               <a:buNone/>
             </a:pPr>
             <a:r>
-              <a:rPr lang="en-US" sz="1150" i="1" dirty="0">
-                <a:solidFill>
-                  <a:srgbClr val="6B7C97"/>
-                </a:solidFill>
-                <a:latin typeface="Calibri" pitchFamily="34" charset="0"/>
-                <a:ea typeface="Calibri" pitchFamily="34" charset="-122"/>
-                <a:cs typeface="Calibri" pitchFamily="34" charset="-120"/>
-              </a:rPr>
-              <a:t>Camera sensor and ISP delay excluded - vendor specification. The sample column is a single interval read from the probe; every one lands inside its predicted best-to-worst window, which is a check on the model rather than a separate result.</a:t>
-            </a:r>
-            <a:endParaRPr lang="en-US" sz="1150" dirty="0"/>
+              <a:rPr lang="en-US" sz="1050" dirty="0">
+                <a:solidFill>
+                  <a:srgbClr val="27374F"/>
+                </a:solidFill>
+                <a:latin typeface="Calibri" pitchFamily="34" charset="0"/>
+                <a:ea typeface="Calibri" pitchFamily="34" charset="-122"/>
+                <a:cs typeface="Calibri" pitchFamily="34" charset="-120"/>
+              </a:rPr>
+              <a:t>Both panorama latencies were measured on the main branch while those modes published 15 fps. The 30 fps and 22.9 fps figures elsewhere in this deck come from the IR-DDR branch, which feeds IR panorama through DDR input buffers instead of live line caches. The render occupancies still fit 33.3 ms, so these bounds remain the best available, but they have not been re-measured on the branch that achieves 30 fps.</a:t>
+            </a:r>
+            <a:endParaRPr lang="en-US" sz="1050" dirty="0"/>
           </a:p>
         </p:txBody>
       </p:sp>
@@ -18133,6 +18452,23 @@
                 <a:cs typeface="Calibri" pitchFamily="34" charset="-120"/>
               </a:rPr>
               <a:t>frame → render done</a:t>
+            </a:r>
+            <a:endParaRPr lang="en-US" sz="1050" dirty="0"/>
+          </a:p>
+          <a:p>
+            <a:pPr algn="ctr" indent="0" marL="0">
+              <a:buNone/>
+            </a:pPr>
+            <a:r>
+              <a:rPr lang="en-US" sz="1050" b="1" dirty="0">
+                <a:solidFill>
+                  <a:srgbClr val="6B7C97"/>
+                </a:solidFill>
+                <a:latin typeface="Calibri" pitchFamily="34" charset="0"/>
+                <a:ea typeface="Calibri" pitchFamily="34" charset="-122"/>
+                <a:cs typeface="Calibri" pitchFamily="34" charset="-120"/>
+              </a:rPr>
+              <a:t>(wait + render)</a:t>
             </a:r>
             <a:endParaRPr lang="en-US" sz="1050" dirty="0"/>
           </a:p>
